--- a/Y9_Exploring_Science/9B_Plant_growth/9B_L02_Plant_adaptations.pptx
+++ b/Y9_Exploring_Science/9B_Plant_growth/9B_L02_Plant_adaptations.pptx
@@ -1829,7 +1829,7 @@
         <p:spPr>
           <a:xfrm>
             <a:off x="548640" y="3657600"/>
-            <a:ext cx="10515600" cy="914400"/>
+            <a:ext cx="10515600" cy="1097280"/>
           </a:xfrm>
           <a:prstGeom prst="rect">
             <a:avLst/>
@@ -1842,7 +1842,7 @@
           <a:lstStyle>
             <a:lvl1pPr indent="0" marL="0">
               <a:buNone/>
-              <a:defRPr lang="en-US" sz="2000" dirty="0">
+              <a:defRPr lang="en-US" sz="2400" dirty="0">
                 <a:solidFill>
                   <a:srgbClr val="FFFFFF"/>
                 </a:solidFill>
@@ -1853,7 +1853,7 @@
             <a:pPr indent="0" marL="0">
               <a:buNone/>
             </a:pPr>
-            <a:endParaRPr lang="en-US" sz="2000" dirty="0"/>
+            <a:endParaRPr lang="en-US" sz="2400" dirty="0"/>
           </a:p>
         </p:txBody>
       </p:sp>
@@ -1953,14 +1953,14 @@
               <a:buNone/>
             </a:pPr>
             <a:r>
-              <a:rPr lang="en-US" sz="900" dirty="0">
+              <a:rPr lang="en-US" sz="1000" dirty="0">
                 <a:solidFill>
                   <a:srgbClr val="5B6574"/>
                 </a:solidFill>
               </a:rPr>
               <a:t>Year 9 Science  |  9B Plant growth  |  Lesson 2: Plant adaptations: roots, stems and leaves</a:t>
             </a:r>
-            <a:endParaRPr lang="en-US" sz="900" dirty="0"/>
+            <a:endParaRPr lang="en-US" sz="1000" dirty="0"/>
           </a:p>
         </p:txBody>
       </p:sp>
@@ -2129,14 +2129,14 @@
               <a:buNone/>
             </a:pPr>
             <a:r>
-              <a:rPr lang="en-US" sz="900" dirty="0">
+              <a:rPr lang="en-US" sz="1000" dirty="0">
                 <a:solidFill>
                   <a:srgbClr val="5B6574"/>
                 </a:solidFill>
               </a:rPr>
               <a:t>Year 9 Science  |  9B Plant growth  |  Lesson 2: Plant adaptations: roots, stems and leaves</a:t>
             </a:r>
-            <a:endParaRPr lang="en-US" sz="900" dirty="0"/>
+            <a:endParaRPr lang="en-US" sz="1000" dirty="0"/>
           </a:p>
         </p:txBody>
       </p:sp>
@@ -2305,14 +2305,14 @@
               <a:buNone/>
             </a:pPr>
             <a:r>
-              <a:rPr lang="en-US" sz="900" dirty="0">
+              <a:rPr lang="en-US" sz="1000" dirty="0">
                 <a:solidFill>
                   <a:srgbClr val="5B6574"/>
                 </a:solidFill>
               </a:rPr>
               <a:t>Year 9 Science  |  9B Plant growth  |  Lesson 2: Plant adaptations: roots, stems and leaves</a:t>
             </a:r>
-            <a:endParaRPr lang="en-US" sz="900" dirty="0"/>
+            <a:endParaRPr lang="en-US" sz="1000" dirty="0"/>
           </a:p>
         </p:txBody>
       </p:sp>
@@ -2441,7 +2441,7 @@
           <a:lstStyle>
             <a:lvl1pPr indent="0" marL="0">
               <a:buNone/>
-              <a:defRPr lang="en-US" sz="3000" b="1" dirty="0">
+              <a:defRPr lang="en-US" sz="3400" b="1" dirty="0">
                 <a:solidFill>
                   <a:srgbClr val="3A2E00"/>
                 </a:solidFill>
@@ -2452,7 +2452,7 @@
             <a:pPr indent="0" marL="0">
               <a:buNone/>
             </a:pPr>
-            <a:endParaRPr lang="en-US" sz="3000" dirty="0"/>
+            <a:endParaRPr lang="en-US" sz="3400" dirty="0"/>
           </a:p>
         </p:txBody>
       </p:sp>
@@ -2869,14 +2869,14 @@
               <a:buNone/>
             </a:pPr>
             <a:r>
-              <a:rPr lang="en-US" sz="1300" b="1" spc="200" kern="0" dirty="0">
+              <a:rPr lang="en-US" sz="1400" b="1" spc="200" kern="0" dirty="0">
                 <a:solidFill>
                   <a:srgbClr val="F2CE3E"/>
                 </a:solidFill>
               </a:rPr>
               <a:t>YEAR 9 SCIENCE  ·  9B PLANT GROWTH  ·  LESSON 2 OF 7</a:t>
             </a:r>
-            <a:endParaRPr lang="en-US" sz="1300" dirty="0"/>
+            <a:endParaRPr lang="en-US" sz="1400" dirty="0"/>
           </a:p>
         </p:txBody>
       </p:sp>
@@ -2929,7 +2929,7 @@
         <p:spPr>
           <a:xfrm>
             <a:off x="548640" y="3657600"/>
-            <a:ext cx="10515600" cy="914400"/>
+            <a:ext cx="10515600" cy="1097280"/>
           </a:xfrm>
           <a:prstGeom prst="rect">
             <a:avLst/>
@@ -2945,14 +2945,14 @@
               <a:buNone/>
             </a:pPr>
             <a:r>
-              <a:rPr lang="en-US" sz="2000" dirty="0">
+              <a:rPr lang="en-US" sz="2400" dirty="0">
                 <a:solidFill>
                   <a:srgbClr val="FFFFFF"/>
                 </a:solidFill>
               </a:rPr>
               <a:t>How is a plant built to collect water, mineral salts, light and carbon dioxide?</a:t>
             </a:r>
-            <a:endParaRPr lang="en-US" sz="2000" dirty="0"/>
+            <a:endParaRPr lang="en-US" sz="2400" dirty="0"/>
           </a:p>
         </p:txBody>
       </p:sp>
@@ -2981,14 +2981,14 @@
               <a:buNone/>
             </a:pPr>
             <a:r>
-              <a:rPr lang="en-US" sz="1200" dirty="0">
+              <a:rPr lang="en-US" sz="1400" dirty="0">
                 <a:solidFill>
                   <a:srgbClr val="C9D3E6"/>
                 </a:solidFill>
               </a:rPr>
               <a:t>Exploring Science International 9  ·  Student Book pages 24 to 25  ·  Workbook pages 17</a:t>
             </a:r>
-            <a:endParaRPr lang="en-US" sz="1200" dirty="0"/>
+            <a:endParaRPr lang="en-US" sz="1400" dirty="0"/>
           </a:p>
         </p:txBody>
       </p:sp>
@@ -3167,14 +3167,14 @@
               <a:buNone/>
             </a:pPr>
             <a:r>
-              <a:rPr lang="en-US" sz="1400" i="1" dirty="0">
+              <a:rPr lang="en-US" sz="1600" i="1" dirty="0">
                 <a:solidFill>
                   <a:srgbClr val="5B6574"/>
                 </a:solidFill>
               </a:rPr>
               <a:t>Mini whiteboards. One answer each, then we check.</a:t>
             </a:r>
-            <a:endParaRPr lang="en-US" sz="1400" dirty="0"/>
+            <a:endParaRPr lang="en-US" sz="1600" dirty="0"/>
           </a:p>
         </p:txBody>
       </p:sp>
@@ -3223,16 +3223,14 @@
           <a:ln/>
         </p:spPr>
         <p:txBody>
-          <a:bodyPr wrap="square" lIns="0" tIns="0" rIns="0" bIns="0" rtlCol="0" anchor="ctr">
-            <a:normAutofit/>
-          </a:bodyPr>
+          <a:bodyPr wrap="square" lIns="0" tIns="0" rIns="0" bIns="0" rtlCol="0" anchor="ctr"/>
           <a:lstStyle/>
           <a:p>
             <a:pPr indent="0" marL="0">
               <a:buNone/>
             </a:pPr>
             <a:r>
-              <a:rPr lang="en-US" sz="1600" b="1" dirty="0">
+              <a:rPr lang="en-US" sz="2000" b="1" dirty="0">
                 <a:solidFill>
                   <a:srgbClr val="7B3A8E"/>
                 </a:solidFill>
@@ -3243,14 +3241,14 @@
               <a:buNone/>
             </a:pPr>
             <a:r>
-              <a:rPr lang="en-US" sz="1600" dirty="0">
+              <a:rPr lang="en-US" sz="2000" dirty="0">
                 <a:solidFill>
                   <a:srgbClr val="141B26"/>
                 </a:solidFill>
               </a:rPr>
               <a:t>Which mineral salt supplies nitrogen for making proteins?</a:t>
             </a:r>
-            <a:endParaRPr lang="en-US" sz="1600" dirty="0"/>
+            <a:endParaRPr lang="en-US" sz="2000" dirty="0"/>
           </a:p>
         </p:txBody>
       </p:sp>
@@ -3299,16 +3297,14 @@
           <a:ln/>
         </p:spPr>
         <p:txBody>
-          <a:bodyPr wrap="square" lIns="0" tIns="0" rIns="0" bIns="0" rtlCol="0" anchor="ctr">
-            <a:normAutofit/>
-          </a:bodyPr>
+          <a:bodyPr wrap="square" lIns="0" tIns="0" rIns="0" bIns="0" rtlCol="0" anchor="ctr"/>
           <a:lstStyle/>
           <a:p>
             <a:pPr indent="0" marL="0">
               <a:buNone/>
             </a:pPr>
             <a:r>
-              <a:rPr lang="en-US" sz="1600" b="1" dirty="0">
+              <a:rPr lang="en-US" sz="2000" b="1" dirty="0">
                 <a:solidFill>
                   <a:srgbClr val="7B3A8E"/>
                 </a:solidFill>
@@ -3319,14 +3315,14 @@
               <a:buNone/>
             </a:pPr>
             <a:r>
-              <a:rPr lang="en-US" sz="1600" dirty="0">
+              <a:rPr lang="en-US" sz="2000" dirty="0">
                 <a:solidFill>
                   <a:srgbClr val="141B26"/>
                 </a:solidFill>
               </a:rPr>
               <a:t>A plant has yellow leaves. Which element is it short of?</a:t>
             </a:r>
-            <a:endParaRPr lang="en-US" sz="1600" dirty="0"/>
+            <a:endParaRPr lang="en-US" sz="2000" dirty="0"/>
           </a:p>
         </p:txBody>
       </p:sp>
@@ -3375,16 +3371,14 @@
           <a:ln/>
         </p:spPr>
         <p:txBody>
-          <a:bodyPr wrap="square" lIns="0" tIns="0" rIns="0" bIns="0" rtlCol="0" anchor="ctr">
-            <a:normAutofit/>
-          </a:bodyPr>
+          <a:bodyPr wrap="square" lIns="0" tIns="0" rIns="0" bIns="0" rtlCol="0" anchor="ctr"/>
           <a:lstStyle/>
           <a:p>
             <a:pPr indent="0" marL="0">
               <a:buNone/>
             </a:pPr>
             <a:r>
-              <a:rPr lang="en-US" sz="1600" b="1" dirty="0">
+              <a:rPr lang="en-US" sz="2000" b="1" dirty="0">
                 <a:solidFill>
                   <a:srgbClr val="7B3A8E"/>
                 </a:solidFill>
@@ -3395,14 +3389,14 @@
               <a:buNone/>
             </a:pPr>
             <a:r>
-              <a:rPr lang="en-US" sz="1600" dirty="0">
+              <a:rPr lang="en-US" sz="2000" dirty="0">
                 <a:solidFill>
                   <a:srgbClr val="141B26"/>
                 </a:solidFill>
               </a:rPr>
               <a:t>How are root hair cells adapted to absorb water quickly?</a:t>
             </a:r>
-            <a:endParaRPr lang="en-US" sz="1600" dirty="0"/>
+            <a:endParaRPr lang="en-US" sz="2000" dirty="0"/>
           </a:p>
         </p:txBody>
       </p:sp>
@@ -3451,16 +3445,14 @@
           <a:ln/>
         </p:spPr>
         <p:txBody>
-          <a:bodyPr wrap="square" lIns="0" tIns="0" rIns="0" bIns="0" rtlCol="0" anchor="ctr">
-            <a:normAutofit/>
-          </a:bodyPr>
+          <a:bodyPr wrap="square" lIns="0" tIns="0" rIns="0" bIns="0" rtlCol="0" anchor="ctr"/>
           <a:lstStyle/>
           <a:p>
             <a:pPr indent="0" marL="0">
               <a:buNone/>
             </a:pPr>
             <a:r>
-              <a:rPr lang="en-US" sz="1600" b="1" dirty="0">
+              <a:rPr lang="en-US" sz="2000" b="1" dirty="0">
                 <a:solidFill>
                   <a:srgbClr val="7B3A8E"/>
                 </a:solidFill>
@@ -3471,14 +3463,14 @@
               <a:buNone/>
             </a:pPr>
             <a:r>
-              <a:rPr lang="en-US" sz="1600" dirty="0">
+              <a:rPr lang="en-US" sz="2000" dirty="0">
                 <a:solidFill>
                   <a:srgbClr val="141B26"/>
                 </a:solidFill>
               </a:rPr>
               <a:t>Which tissue carries water up the stem, xylem or phloem?</a:t>
             </a:r>
-            <a:endParaRPr lang="en-US" sz="1600" dirty="0"/>
+            <a:endParaRPr lang="en-US" sz="2000" dirty="0"/>
           </a:p>
         </p:txBody>
       </p:sp>
@@ -3527,16 +3519,14 @@
           <a:ln/>
         </p:spPr>
         <p:txBody>
-          <a:bodyPr wrap="square" lIns="0" tIns="0" rIns="0" bIns="0" rtlCol="0" anchor="ctr">
-            <a:normAutofit/>
-          </a:bodyPr>
+          <a:bodyPr wrap="square" lIns="0" tIns="0" rIns="0" bIns="0" rtlCol="0" anchor="ctr"/>
           <a:lstStyle/>
           <a:p>
             <a:pPr indent="0" marL="0">
               <a:buNone/>
             </a:pPr>
             <a:r>
-              <a:rPr lang="en-US" sz="1600" b="1" dirty="0">
+              <a:rPr lang="en-US" sz="2000" b="1" dirty="0">
                 <a:solidFill>
                   <a:srgbClr val="7B3A8E"/>
                 </a:solidFill>
@@ -3547,14 +3537,14 @@
               <a:buNone/>
             </a:pPr>
             <a:r>
-              <a:rPr lang="en-US" sz="1600" dirty="0">
+              <a:rPr lang="en-US" sz="2000" dirty="0">
                 <a:solidFill>
                   <a:srgbClr val="141B26"/>
                 </a:solidFill>
               </a:rPr>
               <a:t>Which leaf cells contain the most chloroplasts?</a:t>
             </a:r>
-            <a:endParaRPr lang="en-US" sz="1600" dirty="0"/>
+            <a:endParaRPr lang="en-US" sz="2000" dirty="0"/>
           </a:p>
         </p:txBody>
       </p:sp>
@@ -3883,23 +3873,21 @@
           <a:ln/>
         </p:spPr>
         <p:txBody>
-          <a:bodyPr wrap="square" lIns="0" tIns="0" rIns="0" bIns="0" rtlCol="0" anchor="t">
-            <a:normAutofit/>
-          </a:bodyPr>
+          <a:bodyPr wrap="square" lIns="0" tIns="0" rIns="0" bIns="0" rtlCol="0" anchor="t"/>
           <a:lstStyle/>
           <a:p>
             <a:pPr indent="0" marL="0">
               <a:buNone/>
             </a:pPr>
             <a:r>
-              <a:rPr lang="en-US" sz="1700" dirty="0">
+              <a:rPr lang="en-US" sz="2000" dirty="0">
                 <a:solidFill>
                   <a:srgbClr val="141B26"/>
                 </a:solidFill>
               </a:rPr>
               <a:t>Core: complete the table of what plants need, match the leaf parts, then fill the gaps on the route of water.</a:t>
             </a:r>
-            <a:endParaRPr lang="en-US" sz="1700" dirty="0"/>
+            <a:endParaRPr lang="en-US" sz="2000" dirty="0"/>
           </a:p>
         </p:txBody>
       </p:sp>
@@ -3982,23 +3970,21 @@
           <a:ln/>
         </p:spPr>
         <p:txBody>
-          <a:bodyPr wrap="square" lIns="0" tIns="0" rIns="0" bIns="0" rtlCol="0" anchor="t">
-            <a:normAutofit/>
-          </a:bodyPr>
+          <a:bodyPr wrap="square" lIns="0" tIns="0" rIns="0" bIns="0" rtlCol="0" anchor="t"/>
           <a:lstStyle/>
           <a:p>
             <a:pPr indent="0" marL="0">
               <a:buNone/>
             </a:pPr>
             <a:r>
-              <a:rPr lang="en-US" sz="1700" dirty="0">
+              <a:rPr lang="en-US" sz="2000" dirty="0">
                 <a:solidFill>
                   <a:srgbClr val="141B26"/>
                 </a:solidFill>
               </a:rPr>
               <a:t>Stretch: explain the adaptations of xylem and root hair cells, wilting and recovery, and the yellow leaves.</a:t>
             </a:r>
-            <a:endParaRPr lang="en-US" sz="1700" dirty="0"/>
+            <a:endParaRPr lang="en-US" sz="2000" dirty="0"/>
           </a:p>
         </p:txBody>
       </p:sp>
@@ -4081,23 +4067,21 @@
           <a:ln/>
         </p:spPr>
         <p:txBody>
-          <a:bodyPr wrap="square" lIns="0" tIns="0" rIns="0" bIns="0" rtlCol="0" anchor="t">
-            <a:normAutofit/>
-          </a:bodyPr>
+          <a:bodyPr wrap="square" lIns="0" tIns="0" rIns="0" bIns="0" rtlCol="0" anchor="t"/>
           <a:lstStyle/>
           <a:p>
             <a:pPr indent="0" marL="0">
               <a:buNone/>
             </a:pPr>
             <a:r>
-              <a:rPr lang="en-US" sz="1700" dirty="0">
+              <a:rPr lang="en-US" sz="2000" dirty="0">
                 <a:solidFill>
                   <a:srgbClr val="141B26"/>
                 </a:solidFill>
               </a:rPr>
               <a:t>Challenge: the Venus flytrap and how a leaf supplies its palisade cells.</a:t>
             </a:r>
-            <a:endParaRPr lang="en-US" sz="1700" dirty="0"/>
+            <a:endParaRPr lang="en-US" sz="2000" dirty="0"/>
           </a:p>
         </p:txBody>
       </p:sp>
@@ -4180,23 +4164,21 @@
           <a:ln/>
         </p:spPr>
         <p:txBody>
-          <a:bodyPr wrap="square" lIns="0" tIns="0" rIns="0" bIns="0" rtlCol="0" anchor="t">
-            <a:normAutofit/>
-          </a:bodyPr>
+          <a:bodyPr wrap="square" lIns="0" tIns="0" rIns="0" bIns="0" rtlCol="0" anchor="t"/>
           <a:lstStyle/>
           <a:p>
             <a:pPr indent="0" marL="0">
               <a:buNone/>
             </a:pPr>
             <a:r>
-              <a:rPr lang="en-US" sz="1700" dirty="0">
+              <a:rPr lang="en-US" sz="2000" dirty="0">
                 <a:solidFill>
                   <a:srgbClr val="141B26"/>
                 </a:solidFill>
               </a:rPr>
               <a:t>Optional with your partner: trace a leaf on squared paper and estimate its surface area in cm².</a:t>
             </a:r>
-            <a:endParaRPr lang="en-US" sz="1700" dirty="0"/>
+            <a:endParaRPr lang="en-US" sz="2000" dirty="0"/>
           </a:p>
         </p:txBody>
       </p:sp>
@@ -4225,14 +4207,14 @@
               <a:buNone/>
             </a:pPr>
             <a:r>
-              <a:rPr lang="en-US" sz="1300" i="1" dirty="0">
+              <a:rPr lang="en-US" sz="1500" i="1" dirty="0">
                 <a:solidFill>
                   <a:srgbClr val="5B6574"/>
                 </a:solidFill>
               </a:rPr>
               <a:t>Use the key words box. Every answer about an adaptation should say what the structure is like AND what that lets it do.</a:t>
             </a:r>
-            <a:endParaRPr lang="en-US" sz="1300" dirty="0"/>
+            <a:endParaRPr lang="en-US" sz="1500" dirty="0"/>
           </a:p>
         </p:txBody>
       </p:sp>
@@ -4425,23 +4407,21 @@
           <a:ln/>
         </p:spPr>
         <p:txBody>
-          <a:bodyPr wrap="square" lIns="0" tIns="0" rIns="0" bIns="0" rtlCol="0" anchor="t">
-            <a:normAutofit/>
-          </a:bodyPr>
+          <a:bodyPr wrap="square" lIns="0" tIns="0" rIns="0" bIns="0" rtlCol="0" anchor="t"/>
           <a:lstStyle/>
           <a:p>
             <a:pPr indent="0" marL="0">
               <a:buNone/>
             </a:pPr>
             <a:r>
-              <a:rPr lang="en-US" sz="2200" b="1" dirty="0">
+              <a:rPr lang="en-US" sz="2600" b="1" dirty="0">
                 <a:solidFill>
                   <a:srgbClr val="0F2A5F"/>
                 </a:solidFill>
               </a:rPr>
               <a:t>A pot plant is left without water for a week and wilts. Two hours after watering it stands up straight again. Explain both changes.</a:t>
             </a:r>
-            <a:endParaRPr lang="en-US" sz="2200" dirty="0"/>
+            <a:endParaRPr lang="en-US" sz="2600" dirty="0"/>
           </a:p>
         </p:txBody>
       </p:sp>
@@ -4490,9 +4470,7 @@
           <a:ln/>
         </p:spPr>
         <p:txBody>
-          <a:bodyPr wrap="square" lIns="0" tIns="0" rIns="0" bIns="0" rtlCol="0" anchor="t">
-            <a:normAutofit/>
-          </a:bodyPr>
+          <a:bodyPr wrap="square" lIns="0" tIns="0" rIns="0" bIns="0" rtlCol="0" anchor="t"/>
           <a:lstStyle/>
           <a:p>
             <a:pPr indent="0" marL="0">
@@ -4502,14 +4480,14 @@
               <a:buNone/>
             </a:pPr>
             <a:r>
-              <a:rPr lang="en-US" sz="1500" b="1" dirty="0">
+              <a:rPr lang="en-US" sz="1800" b="1" dirty="0">
                 <a:solidFill>
                   <a:srgbClr val="7B3A8E"/>
                 </a:solidFill>
               </a:rPr>
               <a:t>Sentence frames</a:t>
             </a:r>
-            <a:endParaRPr lang="en-US" sz="1500" dirty="0"/>
+            <a:endParaRPr lang="en-US" sz="1800" dirty="0"/>
           </a:p>
           <a:p>
             <a:pPr indent="0" marL="0">
@@ -4519,14 +4497,14 @@
               <a:buNone/>
             </a:pPr>
             <a:r>
-              <a:rPr lang="en-US" sz="1500" dirty="0">
+              <a:rPr lang="en-US" sz="1800" dirty="0">
                 <a:solidFill>
                   <a:srgbClr val="141B26"/>
                 </a:solidFill>
               </a:rPr>
               <a:t>Without water, the cells ___ so the leaves ___.</a:t>
             </a:r>
-            <a:endParaRPr lang="en-US" sz="1500" dirty="0"/>
+            <a:endParaRPr lang="en-US" sz="1800" dirty="0"/>
           </a:p>
           <a:p>
             <a:pPr indent="0" marL="0">
@@ -4536,14 +4514,14 @@
               <a:buNone/>
             </a:pPr>
             <a:r>
-              <a:rPr lang="en-US" sz="1500" dirty="0">
+              <a:rPr lang="en-US" sz="1800" dirty="0">
                 <a:solidFill>
                   <a:srgbClr val="141B26"/>
                 </a:solidFill>
               </a:rPr>
               <a:t>After watering, water travels from the ___ through the ___ to the leaves.</a:t>
             </a:r>
-            <a:endParaRPr lang="en-US" sz="1500" dirty="0"/>
+            <a:endParaRPr lang="en-US" sz="1800" dirty="0"/>
           </a:p>
           <a:p>
             <a:pPr indent="0" marL="0">
@@ -4553,14 +4531,14 @@
               <a:buNone/>
             </a:pPr>
             <a:r>
-              <a:rPr lang="en-US" sz="1500" dirty="0">
+              <a:rPr lang="en-US" sz="1800" dirty="0">
                 <a:solidFill>
                   <a:srgbClr val="141B26"/>
                 </a:solidFill>
               </a:rPr>
               <a:t>The cells fill up again and become ___.</a:t>
             </a:r>
-            <a:endParaRPr lang="en-US" sz="1500" dirty="0"/>
+            <a:endParaRPr lang="en-US" sz="1800" dirty="0"/>
           </a:p>
         </p:txBody>
       </p:sp>
@@ -4760,14 +4738,14 @@
               <a:buNone/>
             </a:pPr>
             <a:r>
-              <a:rPr lang="en-US" sz="1400" i="1" dirty="0">
+              <a:rPr lang="en-US" sz="1600" i="1" dirty="0">
                 <a:solidFill>
                   <a:srgbClr val="5B6574"/>
                 </a:solidFill>
               </a:rPr>
               <a:t>On your worksheet exit ticket. Work alone. Hand it in as you leave.</a:t>
             </a:r>
-            <a:endParaRPr lang="en-US" sz="1400" dirty="0"/>
+            <a:endParaRPr lang="en-US" sz="1600" dirty="0"/>
           </a:p>
         </p:txBody>
       </p:sp>
@@ -4780,7 +4758,7 @@
         <p:spPr>
           <a:xfrm>
             <a:off x="548640" y="1828800"/>
-            <a:ext cx="10881360" cy="1188720"/>
+            <a:ext cx="9692640" cy="1188720"/>
           </a:xfrm>
           <a:prstGeom prst="rect">
             <a:avLst/>
@@ -4789,16 +4767,14 @@
           <a:ln/>
         </p:spPr>
         <p:txBody>
-          <a:bodyPr wrap="square" lIns="0" tIns="0" rIns="0" bIns="0" rtlCol="0" anchor="t">
-            <a:normAutofit/>
-          </a:bodyPr>
+          <a:bodyPr wrap="square" lIns="0" tIns="0" rIns="0" bIns="0" rtlCol="0" anchor="t"/>
           <a:lstStyle/>
           <a:p>
             <a:pPr indent="0" marL="0">
               <a:buNone/>
             </a:pPr>
             <a:r>
-              <a:rPr lang="en-US" sz="1800" b="1" dirty="0">
+              <a:rPr lang="en-US" sz="2200" b="1" dirty="0">
                 <a:solidFill>
                   <a:srgbClr val="7B3A8E"/>
                 </a:solidFill>
@@ -4809,14 +4785,14 @@
               <a:buNone/>
             </a:pPr>
             <a:r>
-              <a:rPr lang="en-US" sz="1800" dirty="0">
+              <a:rPr lang="en-US" sz="2200" dirty="0">
                 <a:solidFill>
                   <a:srgbClr val="141B26"/>
                 </a:solidFill>
               </a:rPr>
               <a:t>Name the mineral salt a plant needs to make proteins.</a:t>
             </a:r>
-            <a:endParaRPr lang="en-US" sz="1800" dirty="0"/>
+            <a:endParaRPr lang="en-US" sz="2200" dirty="0"/>
           </a:p>
         </p:txBody>
       </p:sp>
@@ -4829,7 +4805,7 @@
         <p:spPr>
           <a:xfrm>
             <a:off x="548640" y="3017520"/>
-            <a:ext cx="10881360" cy="1188720"/>
+            <a:ext cx="9692640" cy="1188720"/>
           </a:xfrm>
           <a:prstGeom prst="rect">
             <a:avLst/>
@@ -4838,16 +4814,14 @@
           <a:ln/>
         </p:spPr>
         <p:txBody>
-          <a:bodyPr wrap="square" lIns="0" tIns="0" rIns="0" bIns="0" rtlCol="0" anchor="t">
-            <a:normAutofit/>
-          </a:bodyPr>
+          <a:bodyPr wrap="square" lIns="0" tIns="0" rIns="0" bIns="0" rtlCol="0" anchor="t"/>
           <a:lstStyle/>
           <a:p>
             <a:pPr indent="0" marL="0">
               <a:buNone/>
             </a:pPr>
             <a:r>
-              <a:rPr lang="en-US" sz="1800" b="1" dirty="0">
+              <a:rPr lang="en-US" sz="2200" b="1" dirty="0">
                 <a:solidFill>
                   <a:srgbClr val="7B3A8E"/>
                 </a:solidFill>
@@ -4858,14 +4832,14 @@
               <a:buNone/>
             </a:pPr>
             <a:r>
-              <a:rPr lang="en-US" sz="1800" dirty="0">
+              <a:rPr lang="en-US" sz="2200" dirty="0">
                 <a:solidFill>
                   <a:srgbClr val="141B26"/>
                 </a:solidFill>
               </a:rPr>
               <a:t>How are root hair cells adapted to absorb water?</a:t>
             </a:r>
-            <a:endParaRPr lang="en-US" sz="1800" dirty="0"/>
+            <a:endParaRPr lang="en-US" sz="2200" dirty="0"/>
           </a:p>
         </p:txBody>
       </p:sp>
@@ -4878,7 +4852,7 @@
         <p:spPr>
           <a:xfrm>
             <a:off x="548640" y="4206240"/>
-            <a:ext cx="10881360" cy="1188720"/>
+            <a:ext cx="9692640" cy="1188720"/>
           </a:xfrm>
           <a:prstGeom prst="rect">
             <a:avLst/>
@@ -4887,16 +4861,14 @@
           <a:ln/>
         </p:spPr>
         <p:txBody>
-          <a:bodyPr wrap="square" lIns="0" tIns="0" rIns="0" bIns="0" rtlCol="0" anchor="t">
-            <a:normAutofit/>
-          </a:bodyPr>
+          <a:bodyPr wrap="square" lIns="0" tIns="0" rIns="0" bIns="0" rtlCol="0" anchor="t"/>
           <a:lstStyle/>
           <a:p>
             <a:pPr indent="0" marL="0">
               <a:buNone/>
             </a:pPr>
             <a:r>
-              <a:rPr lang="en-US" sz="1800" b="1" dirty="0">
+              <a:rPr lang="en-US" sz="2200" b="1" dirty="0">
                 <a:solidFill>
                   <a:srgbClr val="7B3A8E"/>
                 </a:solidFill>
@@ -4907,14 +4879,14 @@
               <a:buNone/>
             </a:pPr>
             <a:r>
-              <a:rPr lang="en-US" sz="1800" dirty="0">
+              <a:rPr lang="en-US" sz="2200" dirty="0">
                 <a:solidFill>
                   <a:srgbClr val="141B26"/>
                 </a:solidFill>
               </a:rPr>
               <a:t>Why do palisade cells contain so many chloroplasts?</a:t>
             </a:r>
-            <a:endParaRPr lang="en-US" sz="1800" dirty="0"/>
+            <a:endParaRPr lang="en-US" sz="2200" dirty="0"/>
           </a:p>
         </p:txBody>
       </p:sp>
@@ -5173,7 +5145,7 @@
         <p:spPr>
           <a:xfrm>
             <a:off x="548640" y="1371600"/>
-            <a:ext cx="10881360" cy="4480560"/>
+            <a:ext cx="10881360" cy="4114800"/>
           </a:xfrm>
           <a:prstGeom prst="rect">
             <a:avLst/>
@@ -5182,81 +5154,79 @@
           <a:ln/>
         </p:spPr>
         <p:txBody>
-          <a:bodyPr wrap="square" lIns="0" tIns="0" rIns="0" bIns="0" rtlCol="0" anchor="t">
-            <a:normAutofit/>
-          </a:bodyPr>
+          <a:bodyPr wrap="square" lIns="0" tIns="0" rIns="0" bIns="0" rtlCol="0" anchor="t"/>
           <a:lstStyle/>
           <a:p>
             <a:pPr marL="342900" indent="-342900">
               <a:spcAft>
-                <a:spcPts val="1000"/>
+                <a:spcPts val="1200"/>
               </a:spcAft>
               <a:buSzPct val="100000"/>
               <a:buChar char="✓"/>
             </a:pPr>
             <a:r>
-              <a:rPr lang="en-US" sz="1700" dirty="0">
+              <a:rPr lang="en-US" sz="2000" dirty="0">
                 <a:solidFill>
                   <a:srgbClr val="141B26"/>
                 </a:solidFill>
               </a:rPr>
               <a:t>Plants need nitrates (proteins), magnesium (chlorophyll) and potassium (absorbing water) from mineral salts in the soil.</a:t>
             </a:r>
-            <a:endParaRPr lang="en-US" sz="1700" dirty="0"/>
+            <a:endParaRPr lang="en-US" sz="2000" dirty="0"/>
           </a:p>
           <a:p>
             <a:pPr marL="342900" indent="-342900">
               <a:spcAft>
-                <a:spcPts val="1000"/>
+                <a:spcPts val="1200"/>
               </a:spcAft>
               <a:buSzPct val="100000"/>
               <a:buChar char="✓"/>
             </a:pPr>
             <a:r>
-              <a:rPr lang="en-US" sz="1700" dirty="0">
+              <a:rPr lang="en-US" sz="2000" dirty="0">
                 <a:solidFill>
                   <a:srgbClr val="141B26"/>
                 </a:solidFill>
               </a:rPr>
               <a:t>Root hair cells have a large surface area; xylem vessels are hollow tubes of dead cells that carry water and mineral salts up.</a:t>
             </a:r>
-            <a:endParaRPr lang="en-US" sz="1700" dirty="0"/>
+            <a:endParaRPr lang="en-US" sz="2000" dirty="0"/>
           </a:p>
           <a:p>
             <a:pPr marL="342900" indent="-342900">
               <a:spcAft>
-                <a:spcPts val="1000"/>
+                <a:spcPts val="1200"/>
               </a:spcAft>
               <a:buSzPct val="100000"/>
               <a:buChar char="✓"/>
             </a:pPr>
             <a:r>
-              <a:rPr lang="en-US" sz="1700" dirty="0">
+              <a:rPr lang="en-US" sz="2000" dirty="0">
                 <a:solidFill>
                   <a:srgbClr val="141B26"/>
                 </a:solidFill>
               </a:rPr>
               <a:t>Water is needed for photosynthesis, cooling and keeping cells firm; too little and the plant wilts.</a:t>
             </a:r>
-            <a:endParaRPr lang="en-US" sz="1700" dirty="0"/>
+            <a:endParaRPr lang="en-US" sz="2000" dirty="0"/>
           </a:p>
           <a:p>
             <a:pPr marL="342900" indent="-342900">
               <a:spcAft>
-                <a:spcPts val="1000"/>
+                <a:spcPts val="1200"/>
               </a:spcAft>
               <a:buSzPct val="100000"/>
               <a:buChar char="✓"/>
             </a:pPr>
             <a:r>
-              <a:rPr lang="en-US" sz="1700" dirty="0">
+              <a:rPr lang="en-US" sz="2000" dirty="0">
                 <a:solidFill>
                   <a:srgbClr val="141B26"/>
                 </a:solidFill>
               </a:rPr>
               <a:t>Leaves are broad and thin, with a waxy cuticle and palisade cells packed with chloroplasts near the top.</a:t>
             </a:r>
-            <a:endParaRPr lang="en-US" sz="1700" dirty="0"/>
+            <a:endParaRPr lang="en-US" sz="2000" dirty="0"/>
           </a:p>
         </p:txBody>
       </p:sp>
@@ -5285,7 +5255,7 @@
               <a:buNone/>
             </a:pPr>
             <a:r>
-              <a:rPr lang="en-US" sz="1300" b="1" dirty="0">
+              <a:rPr lang="en-US" sz="1500" b="1" dirty="0">
                 <a:solidFill>
                   <a:srgbClr val="7B3A8E"/>
                 </a:solidFill>
@@ -5296,14 +5266,14 @@
               <a:buNone/>
             </a:pPr>
             <a:r>
-              <a:rPr lang="en-US" sz="1300" dirty="0">
+              <a:rPr lang="en-US" sz="1500" dirty="0">
                 <a:solidFill>
                   <a:srgbClr val="141B26"/>
                 </a:solidFill>
               </a:rPr>
               <a:t>Gas exchange: how stomata let carbon dioxide in and oxygen and water vapour out.</a:t>
             </a:r>
-            <a:endParaRPr lang="en-US" sz="1300" dirty="0"/>
+            <a:endParaRPr lang="en-US" sz="1500" dirty="0"/>
           </a:p>
         </p:txBody>
       </p:sp>
@@ -5571,60 +5541,58 @@
           <a:ln/>
         </p:spPr>
         <p:txBody>
-          <a:bodyPr wrap="square" lIns="0" tIns="0" rIns="0" bIns="0" rtlCol="0" anchor="t">
-            <a:normAutofit/>
-          </a:bodyPr>
+          <a:bodyPr wrap="square" lIns="0" tIns="0" rIns="0" bIns="0" rtlCol="0" anchor="t"/>
           <a:lstStyle/>
           <a:p>
             <a:pPr indent="0" marL="0">
               <a:spcAft>
-                <a:spcPts val="1000"/>
+                <a:spcPts val="1200"/>
               </a:spcAft>
               <a:buNone/>
             </a:pPr>
             <a:r>
-              <a:rPr lang="en-US" sz="2000" dirty="0">
+              <a:rPr lang="en-US" sz="2400" dirty="0">
                 <a:solidFill>
                   <a:srgbClr val="141B26"/>
                 </a:solidFill>
               </a:rPr>
               <a:t>1. Write the word equation for photosynthesis.</a:t>
             </a:r>
-            <a:endParaRPr lang="en-US" sz="2000" dirty="0"/>
+            <a:endParaRPr lang="en-US" sz="2400" dirty="0"/>
           </a:p>
           <a:p>
             <a:pPr indent="0" marL="0">
               <a:spcAft>
-                <a:spcPts val="1000"/>
+                <a:spcPts val="1200"/>
               </a:spcAft>
               <a:buNone/>
             </a:pPr>
             <a:r>
-              <a:rPr lang="en-US" sz="2000" dirty="0">
+              <a:rPr lang="en-US" sz="2400" dirty="0">
                 <a:solidFill>
                   <a:srgbClr val="141B26"/>
                 </a:solidFill>
               </a:rPr>
               <a:t>2. Which reactant comes from the air, and which comes from the soil?</a:t>
             </a:r>
-            <a:endParaRPr lang="en-US" sz="2000" dirty="0"/>
+            <a:endParaRPr lang="en-US" sz="2400" dirty="0"/>
           </a:p>
           <a:p>
             <a:pPr indent="0" marL="0">
               <a:spcAft>
-                <a:spcPts val="1000"/>
+                <a:spcPts val="1200"/>
               </a:spcAft>
               <a:buNone/>
             </a:pPr>
             <a:r>
-              <a:rPr lang="en-US" sz="2000" dirty="0">
+              <a:rPr lang="en-US" sz="2400" dirty="0">
                 <a:solidFill>
                   <a:srgbClr val="141B26"/>
                 </a:solidFill>
               </a:rPr>
               <a:t>3. Name two other things a plant needs that it gets from the soil.</a:t>
             </a:r>
-            <a:endParaRPr lang="en-US" sz="2000" dirty="0"/>
+            <a:endParaRPr lang="en-US" sz="2400" dirty="0"/>
           </a:p>
         </p:txBody>
       </p:sp>
@@ -5807,8 +5775,8 @@
         </p:nvSpPr>
         <p:spPr>
           <a:xfrm>
-            <a:off x="548640" y="1325880"/>
-            <a:ext cx="5669280" cy="457200"/>
+            <a:off x="548640" y="1280160"/>
+            <a:ext cx="5486400" cy="411480"/>
           </a:xfrm>
           <a:prstGeom prst="rect">
             <a:avLst/>
@@ -5824,14 +5792,14 @@
               <a:buNone/>
             </a:pPr>
             <a:r>
-              <a:rPr lang="en-US" sz="2000" b="1" dirty="0">
+              <a:rPr lang="en-US" sz="2200" b="1" dirty="0">
                 <a:solidFill>
                   <a:srgbClr val="7B3A8E"/>
                 </a:solidFill>
               </a:rPr>
               <a:t>Today I can ...</a:t>
             </a:r>
-            <a:endParaRPr lang="en-US" sz="2000" dirty="0"/>
+            <a:endParaRPr lang="en-US" sz="2200" dirty="0"/>
           </a:p>
         </p:txBody>
       </p:sp>
@@ -5843,8 +5811,8 @@
         </p:nvSpPr>
         <p:spPr>
           <a:xfrm>
-            <a:off x="594360" y="1947672"/>
-            <a:ext cx="292608" cy="292608"/>
+            <a:off x="594360" y="1810512"/>
+            <a:ext cx="310896" cy="310896"/>
           </a:xfrm>
           <a:prstGeom prst="rect">
             <a:avLst/>
@@ -5868,8 +5836,8 @@
         </p:nvSpPr>
         <p:spPr>
           <a:xfrm>
-            <a:off x="1051560" y="1874520"/>
-            <a:ext cx="5120640" cy="868680"/>
+            <a:off x="1097280" y="1737360"/>
+            <a:ext cx="10332720" cy="868680"/>
           </a:xfrm>
           <a:prstGeom prst="rect">
             <a:avLst/>
@@ -5878,23 +5846,21 @@
           <a:ln/>
         </p:spPr>
         <p:txBody>
-          <a:bodyPr wrap="square" lIns="0" tIns="0" rIns="0" bIns="0" rtlCol="0" anchor="t">
-            <a:normAutofit/>
-          </a:bodyPr>
+          <a:bodyPr wrap="square" lIns="0" tIns="0" rIns="0" bIns="0" rtlCol="0" anchor="t"/>
           <a:lstStyle/>
           <a:p>
             <a:pPr indent="0" marL="0">
               <a:buNone/>
             </a:pPr>
             <a:r>
-              <a:rPr lang="en-US" sz="1600" dirty="0">
+              <a:rPr lang="en-US" sz="2000" dirty="0">
                 <a:solidFill>
                   <a:srgbClr val="141B26"/>
                 </a:solidFill>
               </a:rPr>
               <a:t>I can describe what plants need from the soil and the air, and how roots, root hair cells and xylem are adapted to supply water and mineral salts.</a:t>
             </a:r>
-            <a:endParaRPr lang="en-US" sz="1600" dirty="0"/>
+            <a:endParaRPr lang="en-US" sz="2000" dirty="0"/>
           </a:p>
         </p:txBody>
       </p:sp>
@@ -5906,8 +5872,8 @@
         </p:nvSpPr>
         <p:spPr>
           <a:xfrm>
-            <a:off x="594360" y="2907792"/>
-            <a:ext cx="292608" cy="292608"/>
+            <a:off x="594360" y="2679192"/>
+            <a:ext cx="310896" cy="310896"/>
           </a:xfrm>
           <a:prstGeom prst="rect">
             <a:avLst/>
@@ -5931,8 +5897,8 @@
         </p:nvSpPr>
         <p:spPr>
           <a:xfrm>
-            <a:off x="1051560" y="2834640"/>
-            <a:ext cx="5120640" cy="868680"/>
+            <a:off x="1097280" y="2606040"/>
+            <a:ext cx="10332720" cy="868680"/>
           </a:xfrm>
           <a:prstGeom prst="rect">
             <a:avLst/>
@@ -5941,23 +5907,21 @@
           <a:ln/>
         </p:spPr>
         <p:txBody>
-          <a:bodyPr wrap="square" lIns="0" tIns="0" rIns="0" bIns="0" rtlCol="0" anchor="t">
-            <a:normAutofit/>
-          </a:bodyPr>
+          <a:bodyPr wrap="square" lIns="0" tIns="0" rIns="0" bIns="0" rtlCol="0" anchor="t"/>
           <a:lstStyle/>
           <a:p>
             <a:pPr indent="0" marL="0">
               <a:buNone/>
             </a:pPr>
             <a:r>
-              <a:rPr lang="en-US" sz="1600" dirty="0">
+              <a:rPr lang="en-US" sz="2000" dirty="0">
                 <a:solidFill>
                   <a:srgbClr val="141B26"/>
                 </a:solidFill>
               </a:rPr>
               <a:t>I can explain how a leaf and its palisade cells are adapted for photosynthesis.</a:t>
             </a:r>
-            <a:endParaRPr lang="en-US" sz="1600" dirty="0"/>
+            <a:endParaRPr lang="en-US" sz="2000" dirty="0"/>
           </a:p>
         </p:txBody>
       </p:sp>
@@ -5969,8 +5933,8 @@
         </p:nvSpPr>
         <p:spPr>
           <a:xfrm>
-            <a:off x="6583680" y="1325880"/>
-            <a:ext cx="5029200" cy="457200"/>
+            <a:off x="548640" y="3611880"/>
+            <a:ext cx="5486400" cy="411480"/>
           </a:xfrm>
           <a:prstGeom prst="rect">
             <a:avLst/>
@@ -5986,14 +5950,14 @@
               <a:buNone/>
             </a:pPr>
             <a:r>
-              <a:rPr lang="en-US" sz="2000" b="1" dirty="0">
+              <a:rPr lang="en-US" sz="2200" b="1" dirty="0">
                 <a:solidFill>
                   <a:srgbClr val="7B3A8E"/>
                 </a:solidFill>
               </a:rPr>
               <a:t>Key words today</a:t>
             </a:r>
-            <a:endParaRPr lang="en-US" sz="2000" dirty="0"/>
+            <a:endParaRPr lang="en-US" sz="2200" dirty="0"/>
           </a:p>
         </p:txBody>
       </p:sp>
@@ -6005,8 +5969,8 @@
         </p:nvSpPr>
         <p:spPr>
           <a:xfrm>
-            <a:off x="6583680" y="1874520"/>
-            <a:ext cx="5029200" cy="4023360"/>
+            <a:off x="548640" y="4069080"/>
+            <a:ext cx="3515258" cy="1920240"/>
           </a:xfrm>
           <a:prstGeom prst="rect">
             <a:avLst/>
@@ -6015,350 +5979,285 @@
           <a:ln/>
         </p:spPr>
         <p:txBody>
-          <a:bodyPr wrap="square" lIns="0" tIns="0" rIns="0" bIns="0" rtlCol="0" anchor="t">
-            <a:normAutofit/>
-          </a:bodyPr>
+          <a:bodyPr wrap="square" lIns="0" tIns="0" rIns="0" bIns="0" rtlCol="0" anchor="t"/>
+          <a:lstStyle/>
+          <a:p>
+            <a:pPr marL="304800" indent="-304800">
+              <a:spcAft>
+                <a:spcPts val="600"/>
+              </a:spcAft>
+              <a:buSzPct val="100000"/>
+              <a:buChar char="•"/>
+            </a:pPr>
+            <a:r>
+              <a:rPr lang="en-US" sz="2100" b="1" dirty="0">
+                <a:solidFill>
+                  <a:srgbClr val="0F2A5F"/>
+                </a:solidFill>
+              </a:rPr>
+              <a:t>mineral salts</a:t>
+            </a:r>
+            <a:endParaRPr lang="en-US" sz="2100" dirty="0"/>
+          </a:p>
+          <a:p>
+            <a:pPr marL="304800" indent="-304800">
+              <a:spcAft>
+                <a:spcPts val="600"/>
+              </a:spcAft>
+              <a:buSzPct val="100000"/>
+              <a:buChar char="•"/>
+            </a:pPr>
+            <a:r>
+              <a:rPr lang="en-US" sz="2100" b="1" dirty="0">
+                <a:solidFill>
+                  <a:srgbClr val="0F2A5F"/>
+                </a:solidFill>
+              </a:rPr>
+              <a:t>nitrate</a:t>
+            </a:r>
+            <a:endParaRPr lang="en-US" sz="2100" dirty="0"/>
+          </a:p>
+          <a:p>
+            <a:pPr marL="304800" indent="-304800">
+              <a:spcAft>
+                <a:spcPts val="600"/>
+              </a:spcAft>
+              <a:buSzPct val="100000"/>
+              <a:buChar char="•"/>
+            </a:pPr>
+            <a:r>
+              <a:rPr lang="en-US" sz="2100" b="1" dirty="0">
+                <a:solidFill>
+                  <a:srgbClr val="0F2A5F"/>
+                </a:solidFill>
+              </a:rPr>
+              <a:t>magnesium</a:t>
+            </a:r>
+            <a:endParaRPr lang="en-US" sz="2100" dirty="0"/>
+          </a:p>
+          <a:p>
+            <a:pPr marL="304800" indent="-304800">
+              <a:spcAft>
+                <a:spcPts val="600"/>
+              </a:spcAft>
+              <a:buSzPct val="100000"/>
+              <a:buChar char="•"/>
+            </a:pPr>
+            <a:r>
+              <a:rPr lang="en-US" sz="2100" b="1" dirty="0">
+                <a:solidFill>
+                  <a:srgbClr val="0F2A5F"/>
+                </a:solidFill>
+              </a:rPr>
+              <a:t>potassium</a:t>
+            </a:r>
+            <a:endParaRPr lang="en-US" sz="2100" dirty="0"/>
+          </a:p>
+        </p:txBody>
+      </p:sp>
+      <p:sp>
+        <p:nvSpPr>
+          <p:cNvPr id="12" name="Text 10"/>
+          <p:cNvSpPr txBox="1"/>
+          <p:nvPr/>
+        </p:nvSpPr>
+        <p:spPr>
+          <a:xfrm>
+            <a:off x="4338218" y="4069080"/>
+            <a:ext cx="3515258" cy="1920240"/>
+          </a:xfrm>
+          <a:prstGeom prst="rect">
+            <a:avLst/>
+          </a:prstGeom>
+          <a:noFill/>
+          <a:ln/>
+        </p:spPr>
+        <p:txBody>
+          <a:bodyPr wrap="square" lIns="0" tIns="0" rIns="0" bIns="0" rtlCol="0" anchor="t"/>
+          <a:lstStyle/>
+          <a:p>
+            <a:pPr marL="304800" indent="-304800">
+              <a:spcAft>
+                <a:spcPts val="600"/>
+              </a:spcAft>
+              <a:buSzPct val="100000"/>
+              <a:buChar char="•"/>
+            </a:pPr>
+            <a:r>
+              <a:rPr lang="en-US" sz="2100" b="1" dirty="0">
+                <a:solidFill>
+                  <a:srgbClr val="0F2A5F"/>
+                </a:solidFill>
+              </a:rPr>
+              <a:t>root hair cell</a:t>
+            </a:r>
+            <a:endParaRPr lang="en-US" sz="2100" dirty="0"/>
+          </a:p>
+          <a:p>
+            <a:pPr marL="304800" indent="-304800">
+              <a:spcAft>
+                <a:spcPts val="600"/>
+              </a:spcAft>
+              <a:buSzPct val="100000"/>
+              <a:buChar char="•"/>
+            </a:pPr>
+            <a:r>
+              <a:rPr lang="en-US" sz="2100" b="1" dirty="0">
+                <a:solidFill>
+                  <a:srgbClr val="0F2A5F"/>
+                </a:solidFill>
+              </a:rPr>
+              <a:t>xylem</a:t>
+            </a:r>
+            <a:endParaRPr lang="en-US" sz="2100" dirty="0"/>
+          </a:p>
+          <a:p>
+            <a:pPr marL="304800" indent="-304800">
+              <a:spcAft>
+                <a:spcPts val="600"/>
+              </a:spcAft>
+              <a:buSzPct val="100000"/>
+              <a:buChar char="•"/>
+            </a:pPr>
+            <a:r>
+              <a:rPr lang="en-US" sz="2100" b="1" dirty="0">
+                <a:solidFill>
+                  <a:srgbClr val="0F2A5F"/>
+                </a:solidFill>
+              </a:rPr>
+              <a:t>wilt</a:t>
+            </a:r>
+            <a:endParaRPr lang="en-US" sz="2100" dirty="0"/>
+          </a:p>
+          <a:p>
+            <a:pPr marL="304800" indent="-304800">
+              <a:spcAft>
+                <a:spcPts val="600"/>
+              </a:spcAft>
+              <a:buSzPct val="100000"/>
+              <a:buChar char="•"/>
+            </a:pPr>
+            <a:r>
+              <a:rPr lang="en-US" sz="2100" b="1" dirty="0">
+                <a:solidFill>
+                  <a:srgbClr val="0F2A5F"/>
+                </a:solidFill>
+              </a:rPr>
+              <a:t>palisade cell</a:t>
+            </a:r>
+            <a:endParaRPr lang="en-US" sz="2100" dirty="0"/>
+          </a:p>
+        </p:txBody>
+      </p:sp>
+      <p:sp>
+        <p:nvSpPr>
+          <p:cNvPr id="13" name="Text 11"/>
+          <p:cNvSpPr txBox="1"/>
+          <p:nvPr/>
+        </p:nvSpPr>
+        <p:spPr>
+          <a:xfrm>
+            <a:off x="8127797" y="4069080"/>
+            <a:ext cx="3515258" cy="1920240"/>
+          </a:xfrm>
+          <a:prstGeom prst="rect">
+            <a:avLst/>
+          </a:prstGeom>
+          <a:noFill/>
+          <a:ln/>
+        </p:spPr>
+        <p:txBody>
+          <a:bodyPr wrap="square" lIns="0" tIns="0" rIns="0" bIns="0" rtlCol="0" anchor="t"/>
+          <a:lstStyle/>
+          <a:p>
+            <a:pPr marL="304800" indent="-304800">
+              <a:spcAft>
+                <a:spcPts val="600"/>
+              </a:spcAft>
+              <a:buSzPct val="100000"/>
+              <a:buChar char="•"/>
+            </a:pPr>
+            <a:r>
+              <a:rPr lang="en-US" sz="2200" b="1" dirty="0">
+                <a:solidFill>
+                  <a:srgbClr val="0F2A5F"/>
+                </a:solidFill>
+              </a:rPr>
+              <a:t>epidermis</a:t>
+            </a:r>
+            <a:endParaRPr lang="en-US" sz="2200" dirty="0"/>
+          </a:p>
+          <a:p>
+            <a:pPr marL="304800" indent="-304800">
+              <a:spcAft>
+                <a:spcPts val="600"/>
+              </a:spcAft>
+              <a:buSzPct val="100000"/>
+              <a:buChar char="•"/>
+            </a:pPr>
+            <a:r>
+              <a:rPr lang="en-US" sz="2200" b="1" dirty="0">
+                <a:solidFill>
+                  <a:srgbClr val="0F2A5F"/>
+                </a:solidFill>
+              </a:rPr>
+              <a:t>cuticle</a:t>
+            </a:r>
+            <a:endParaRPr lang="en-US" sz="2200" dirty="0"/>
+          </a:p>
+          <a:p>
+            <a:pPr marL="304800" indent="-304800">
+              <a:spcAft>
+                <a:spcPts val="600"/>
+              </a:spcAft>
+              <a:buSzPct val="100000"/>
+              <a:buChar char="•"/>
+            </a:pPr>
+            <a:r>
+              <a:rPr lang="en-US" sz="2200" b="1" dirty="0">
+                <a:solidFill>
+                  <a:srgbClr val="0F2A5F"/>
+                </a:solidFill>
+              </a:rPr>
+              <a:t>surface area</a:t>
+            </a:r>
+            <a:endParaRPr lang="en-US" sz="2200" dirty="0"/>
+          </a:p>
+        </p:txBody>
+      </p:sp>
+      <p:sp>
+        <p:nvSpPr>
+          <p:cNvPr id="14" name="Text 12"/>
+          <p:cNvSpPr txBox="1"/>
+          <p:nvPr/>
+        </p:nvSpPr>
+        <p:spPr>
+          <a:xfrm>
+            <a:off x="548640" y="6035040"/>
+            <a:ext cx="10881360" cy="320040"/>
+          </a:xfrm>
+          <a:prstGeom prst="rect">
+            <a:avLst/>
+          </a:prstGeom>
+          <a:noFill/>
+          <a:ln/>
+        </p:spPr>
+        <p:txBody>
+          <a:bodyPr wrap="square" lIns="0" tIns="0" rIns="0" bIns="0" rtlCol="0" anchor="ctr"/>
           <a:lstStyle/>
           <a:p>
             <a:pPr indent="0" marL="0">
-              <a:spcAft>
-                <a:spcPts val="500"/>
-              </a:spcAft>
-              <a:buNone/>
-            </a:pPr>
-            <a:r>
-              <a:rPr lang="en-US" sz="1300" b="1" dirty="0">
-                <a:solidFill>
-                  <a:srgbClr val="0F2A5F"/>
-                </a:solidFill>
-              </a:rPr>
-              <a:t>mineral salts</a:t>
-            </a:r>
-            <a:pPr indent="0" marL="0">
-              <a:spcAft>
-                <a:spcPts val="500"/>
-              </a:spcAft>
-              <a:buNone/>
-            </a:pPr>
-            <a:r>
-              <a:rPr lang="en-US" sz="1300" dirty="0">
-                <a:solidFill>
-                  <a:srgbClr val="141B26"/>
-                </a:solidFill>
-              </a:rPr>
-              <a:t>  substances dissolved in soil water that plants need to stay healthy, e.g. nitrates</a:t>
-            </a:r>
-            <a:endParaRPr lang="en-US" sz="1300" dirty="0"/>
-          </a:p>
-          <a:p>
-            <a:pPr indent="0" marL="0">
-              <a:spcAft>
-                <a:spcPts val="500"/>
-              </a:spcAft>
-              <a:buNone/>
-            </a:pPr>
-            <a:r>
-              <a:rPr lang="en-US" sz="1300" b="1" dirty="0">
-                <a:solidFill>
-                  <a:srgbClr val="0F2A5F"/>
-                </a:solidFill>
-              </a:rPr>
-              <a:t>nitrate</a:t>
-            </a:r>
-            <a:pPr indent="0" marL="0">
-              <a:spcAft>
-                <a:spcPts val="500"/>
-              </a:spcAft>
-              <a:buNone/>
-            </a:pPr>
-            <a:r>
-              <a:rPr lang="en-US" sz="1300" dirty="0">
-                <a:solidFill>
-                  <a:srgbClr val="141B26"/>
-                </a:solidFill>
-              </a:rPr>
-              <a:t>  a mineral salt that supplies nitrogen for making proteins</a:t>
-            </a:r>
-            <a:endParaRPr lang="en-US" sz="1300" dirty="0"/>
-          </a:p>
-          <a:p>
-            <a:pPr indent="0" marL="0">
-              <a:spcAft>
-                <a:spcPts val="500"/>
-              </a:spcAft>
-              <a:buNone/>
-            </a:pPr>
-            <a:r>
-              <a:rPr lang="en-US" sz="1300" b="1" dirty="0">
-                <a:solidFill>
-                  <a:srgbClr val="0F2A5F"/>
-                </a:solidFill>
-              </a:rPr>
-              <a:t>magnesium</a:t>
-            </a:r>
-            <a:pPr indent="0" marL="0">
-              <a:spcAft>
-                <a:spcPts val="500"/>
-              </a:spcAft>
-              <a:buNone/>
-            </a:pPr>
-            <a:r>
-              <a:rPr lang="en-US" sz="1300" dirty="0">
-                <a:solidFill>
-                  <a:srgbClr val="141B26"/>
-                </a:solidFill>
-              </a:rPr>
-              <a:t>  an element plants need to make chlorophyll</a:t>
-            </a:r>
-            <a:endParaRPr lang="en-US" sz="1300" dirty="0"/>
-          </a:p>
-          <a:p>
-            <a:pPr indent="0" marL="0">
-              <a:spcAft>
-                <a:spcPts val="500"/>
-              </a:spcAft>
-              <a:buNone/>
-            </a:pPr>
-            <a:r>
-              <a:rPr lang="en-US" sz="1300" b="1" dirty="0">
-                <a:solidFill>
-                  <a:srgbClr val="0F2A5F"/>
-                </a:solidFill>
-              </a:rPr>
-              <a:t>potassium</a:t>
-            </a:r>
-            <a:pPr indent="0" marL="0">
-              <a:spcAft>
-                <a:spcPts val="500"/>
-              </a:spcAft>
-              <a:buNone/>
-            </a:pPr>
-            <a:r>
-              <a:rPr lang="en-US" sz="1300" dirty="0">
-                <a:solidFill>
-                  <a:srgbClr val="141B26"/>
-                </a:solidFill>
-              </a:rPr>
-              <a:t>  an element root cells need to absorb water properly</a:t>
-            </a:r>
-            <a:endParaRPr lang="en-US" sz="1300" dirty="0"/>
-          </a:p>
-          <a:p>
-            <a:pPr indent="0" marL="0">
-              <a:spcAft>
-                <a:spcPts val="500"/>
-              </a:spcAft>
-              <a:buNone/>
-            </a:pPr>
-            <a:r>
-              <a:rPr lang="en-US" sz="1300" b="1" dirty="0">
-                <a:solidFill>
-                  <a:srgbClr val="0F2A5F"/>
-                </a:solidFill>
-              </a:rPr>
-              <a:t>root hair cell</a:t>
-            </a:r>
-            <a:pPr indent="0" marL="0">
-              <a:spcAft>
-                <a:spcPts val="500"/>
-              </a:spcAft>
-              <a:buNone/>
-            </a:pPr>
-            <a:r>
-              <a:rPr lang="en-US" sz="1300" dirty="0">
-                <a:solidFill>
-                  <a:srgbClr val="141B26"/>
-                </a:solidFill>
-              </a:rPr>
-              <a:t>  a root cell with a long extension that gives a large surface area for absorbing water</a:t>
-            </a:r>
-            <a:endParaRPr lang="en-US" sz="1300" dirty="0"/>
-          </a:p>
-          <a:p>
-            <a:pPr indent="0" marL="0">
-              <a:spcAft>
-                <a:spcPts val="500"/>
-              </a:spcAft>
-              <a:buNone/>
-            </a:pPr>
-            <a:r>
-              <a:rPr lang="en-US" sz="1300" b="1" dirty="0">
-                <a:solidFill>
-                  <a:srgbClr val="0F2A5F"/>
-                </a:solidFill>
-              </a:rPr>
-              <a:t>xylem</a:t>
-            </a:r>
-            <a:pPr indent="0" marL="0">
-              <a:spcAft>
-                <a:spcPts val="500"/>
-              </a:spcAft>
-              <a:buNone/>
-            </a:pPr>
-            <a:r>
-              <a:rPr lang="en-US" sz="1300" dirty="0">
-                <a:solidFill>
-                  <a:srgbClr val="141B26"/>
-                </a:solidFill>
-              </a:rPr>
-              <a:t>  hollow tubes made from dead cells that carry water and mineral salts up the plant</a:t>
-            </a:r>
-            <a:endParaRPr lang="en-US" sz="1300" dirty="0"/>
-          </a:p>
-          <a:p>
-            <a:pPr indent="0" marL="0">
-              <a:spcAft>
-                <a:spcPts val="500"/>
-              </a:spcAft>
-              <a:buNone/>
-            </a:pPr>
-            <a:r>
-              <a:rPr lang="en-US" sz="1300" b="1" dirty="0">
-                <a:solidFill>
-                  <a:srgbClr val="0F2A5F"/>
-                </a:solidFill>
-              </a:rPr>
-              <a:t>wilt</a:t>
-            </a:r>
-            <a:pPr indent="0" marL="0">
-              <a:spcAft>
-                <a:spcPts val="500"/>
-              </a:spcAft>
-              <a:buNone/>
-            </a:pPr>
-            <a:r>
-              <a:rPr lang="en-US" sz="1300" dirty="0">
-                <a:solidFill>
-                  <a:srgbClr val="141B26"/>
-                </a:solidFill>
-              </a:rPr>
-              <a:t>  to droop because the cells have too little water</a:t>
-            </a:r>
-            <a:endParaRPr lang="en-US" sz="1300" dirty="0"/>
-          </a:p>
-          <a:p>
-            <a:pPr indent="0" marL="0">
-              <a:spcAft>
-                <a:spcPts val="500"/>
-              </a:spcAft>
-              <a:buNone/>
-            </a:pPr>
-            <a:r>
-              <a:rPr lang="en-US" sz="1300" b="1" dirty="0">
-                <a:solidFill>
-                  <a:srgbClr val="0F2A5F"/>
-                </a:solidFill>
-              </a:rPr>
-              <a:t>palisade cell</a:t>
-            </a:r>
-            <a:pPr indent="0" marL="0">
-              <a:spcAft>
-                <a:spcPts val="500"/>
-              </a:spcAft>
-              <a:buNone/>
-            </a:pPr>
-            <a:r>
-              <a:rPr lang="en-US" sz="1300" dirty="0">
-                <a:solidFill>
-                  <a:srgbClr val="141B26"/>
-                </a:solidFill>
-              </a:rPr>
-              <a:t>  a leaf cell near the upper surface that is packed with chloroplasts</a:t>
-            </a:r>
-            <a:endParaRPr lang="en-US" sz="1300" dirty="0"/>
-          </a:p>
-          <a:p>
-            <a:pPr indent="0" marL="0">
-              <a:spcAft>
-                <a:spcPts val="500"/>
-              </a:spcAft>
-              <a:buNone/>
-            </a:pPr>
-            <a:r>
-              <a:rPr lang="en-US" sz="1300" b="1" dirty="0">
-                <a:solidFill>
-                  <a:srgbClr val="0F2A5F"/>
-                </a:solidFill>
-              </a:rPr>
-              <a:t>epidermis</a:t>
-            </a:r>
-            <a:pPr indent="0" marL="0">
-              <a:spcAft>
-                <a:spcPts val="500"/>
-              </a:spcAft>
-              <a:buNone/>
-            </a:pPr>
-            <a:r>
-              <a:rPr lang="en-US" sz="1300" dirty="0">
-                <a:solidFill>
-                  <a:srgbClr val="141B26"/>
-                </a:solidFill>
-              </a:rPr>
-              <a:t>  the outer layer of cells of a leaf</a:t>
-            </a:r>
-            <a:endParaRPr lang="en-US" sz="1300" dirty="0"/>
-          </a:p>
-          <a:p>
-            <a:pPr indent="0" marL="0">
-              <a:spcAft>
-                <a:spcPts val="500"/>
-              </a:spcAft>
-              <a:buNone/>
-            </a:pPr>
-            <a:r>
-              <a:rPr lang="en-US" sz="1300" b="1" dirty="0">
-                <a:solidFill>
-                  <a:srgbClr val="0F2A5F"/>
-                </a:solidFill>
-              </a:rPr>
-              <a:t>cuticle</a:t>
-            </a:r>
-            <a:pPr indent="0" marL="0">
-              <a:spcAft>
-                <a:spcPts val="500"/>
-              </a:spcAft>
-              <a:buNone/>
-            </a:pPr>
-            <a:r>
-              <a:rPr lang="en-US" sz="1300" dirty="0">
-                <a:solidFill>
-                  <a:srgbClr val="141B26"/>
-                </a:solidFill>
-              </a:rPr>
-              <a:t>  the waxy layer on a leaf that stops it losing too much water</a:t>
-            </a:r>
-            <a:endParaRPr lang="en-US" sz="1300" dirty="0"/>
-          </a:p>
-          <a:p>
-            <a:pPr indent="0" marL="0">
-              <a:spcAft>
-                <a:spcPts val="500"/>
-              </a:spcAft>
-              <a:buNone/>
-            </a:pPr>
-            <a:r>
-              <a:rPr lang="en-US" sz="1300" b="1" dirty="0">
-                <a:solidFill>
-                  <a:srgbClr val="0F2A5F"/>
-                </a:solidFill>
-              </a:rPr>
-              <a:t>surface area</a:t>
-            </a:r>
-            <a:pPr indent="0" marL="0">
-              <a:spcAft>
-                <a:spcPts val="500"/>
-              </a:spcAft>
-              <a:buNone/>
-            </a:pPr>
-            <a:r>
-              <a:rPr lang="en-US" sz="1300" dirty="0">
-                <a:solidFill>
-                  <a:srgbClr val="141B26"/>
-                </a:solidFill>
-              </a:rPr>
-              <a:t>  the total area of the outside of something</a:t>
-            </a:r>
-            <a:endParaRPr lang="en-US" sz="1300" dirty="0"/>
+              <a:buNone/>
+            </a:pPr>
+            <a:r>
+              <a:rPr lang="en-US" sz="1400" i="1" dirty="0">
+                <a:solidFill>
+                  <a:srgbClr val="5B6574"/>
+                </a:solidFill>
+              </a:rPr>
+              <a:t>Meanings are in the key words box on your worksheet.</a:t>
+            </a:r>
+            <a:endParaRPr lang="en-US" sz="1400" dirty="0"/>
           </a:p>
         </p:txBody>
       </p:sp>
@@ -6542,7 +6441,7 @@
         <p:spPr>
           <a:xfrm>
             <a:off x="548640" y="1371600"/>
-            <a:ext cx="5394960" cy="2377440"/>
+            <a:ext cx="5394960" cy="2651760"/>
           </a:xfrm>
           <a:prstGeom prst="rect">
             <a:avLst/>
@@ -6551,23 +6450,21 @@
           <a:ln/>
         </p:spPr>
         <p:txBody>
-          <a:bodyPr wrap="square" lIns="0" tIns="0" rIns="0" bIns="0" rtlCol="0" anchor="t">
-            <a:normAutofit/>
-          </a:bodyPr>
+          <a:bodyPr wrap="square" lIns="0" tIns="0" rIns="0" bIns="0" rtlCol="0" anchor="t"/>
           <a:lstStyle/>
           <a:p>
             <a:pPr indent="0" marL="0">
               <a:buNone/>
             </a:pPr>
             <a:r>
-              <a:rPr lang="en-US" sz="2800" b="1" dirty="0">
+              <a:rPr lang="en-US" sz="2900" b="1" dirty="0">
                 <a:solidFill>
                   <a:srgbClr val="0F2A5F"/>
                 </a:solidFill>
               </a:rPr>
               <a:t>The Venus flytrap grows in bogs where the soil contains very few mineral salts. What does it get from a fly that it cannot get from the soil?</a:t>
             </a:r>
-            <a:endParaRPr lang="en-US" sz="2800" dirty="0"/>
+            <a:endParaRPr lang="en-US" sz="2900" dirty="0"/>
           </a:p>
         </p:txBody>
       </p:sp>
@@ -6579,8 +6476,8 @@
         </p:nvSpPr>
         <p:spPr>
           <a:xfrm>
-            <a:off x="548640" y="3794760"/>
-            <a:ext cx="5394960" cy="2103120"/>
+            <a:off x="548640" y="4114800"/>
+            <a:ext cx="5394960" cy="1828800"/>
           </a:xfrm>
           <a:prstGeom prst="rect">
             <a:avLst/>
@@ -6589,9 +6486,7 @@
           <a:ln/>
         </p:spPr>
         <p:txBody>
-          <a:bodyPr wrap="square" lIns="0" tIns="0" rIns="0" bIns="0" rtlCol="0" anchor="t">
-            <a:normAutofit/>
-          </a:bodyPr>
+          <a:bodyPr wrap="square" lIns="0" tIns="0" rIns="0" bIns="0" rtlCol="0" anchor="t"/>
           <a:lstStyle/>
           <a:p>
             <a:pPr indent="0" marL="0">
@@ -6601,14 +6496,14 @@
               <a:buNone/>
             </a:pPr>
             <a:r>
-              <a:rPr lang="en-US" sz="1600" dirty="0">
+              <a:rPr lang="en-US" sz="2000" dirty="0">
                 <a:solidFill>
                   <a:srgbClr val="141B26"/>
                 </a:solidFill>
               </a:rPr>
               <a:t>Talk to a partner. Then: suggest why a hair has to be touched more than once before the trap shuts.</a:t>
             </a:r>
-            <a:endParaRPr lang="en-US" sz="1600" dirty="0"/>
+            <a:endParaRPr lang="en-US" sz="2000" dirty="0"/>
           </a:p>
         </p:txBody>
       </p:sp>
@@ -6645,7 +6540,7 @@
         <p:spPr>
           <a:xfrm>
             <a:off x="6309360" y="5532120"/>
-            <a:ext cx="5303520" cy="502920"/>
+            <a:ext cx="5303520" cy="548640"/>
           </a:xfrm>
           <a:prstGeom prst="rect">
             <a:avLst/>
@@ -6661,7 +6556,7 @@
               <a:buNone/>
             </a:pPr>
             <a:r>
-              <a:rPr lang="en-US" sz="1100" dirty="0">
+              <a:rPr lang="en-US" sz="1300" dirty="0">
                 <a:solidFill>
                   <a:srgbClr val="141B26"/>
                 </a:solidFill>
@@ -6671,21 +6566,21 @@
             <a:pPr algn="l" indent="0" marL="0">
               <a:buNone/>
             </a:pPr>
-            <a:endParaRPr lang="en-US" sz="1100" dirty="0"/>
+            <a:endParaRPr lang="en-US" sz="1300" dirty="0"/>
           </a:p>
           <a:p>
             <a:pPr algn="l" indent="0" marL="0">
               <a:buNone/>
             </a:pPr>
             <a:r>
-              <a:rPr lang="en-US" sz="800" dirty="0">
+              <a:rPr lang="en-US" sz="900" dirty="0">
                 <a:solidFill>
                   <a:srgbClr val="5B6574"/>
                 </a:solidFill>
               </a:rPr>
               <a:t>Image: Noah Elhardt, CC BY-SA 2.5, via Wikimedia Commons</a:t>
             </a:r>
-            <a:endParaRPr lang="en-US" sz="1100" dirty="0"/>
+            <a:endParaRPr lang="en-US" sz="1300" dirty="0"/>
           </a:p>
         </p:txBody>
       </p:sp>
@@ -6868,8 +6763,8 @@
         </p:nvSpPr>
         <p:spPr>
           <a:xfrm>
-            <a:off x="548640" y="6053328"/>
-            <a:ext cx="9601200" cy="292608"/>
+            <a:off x="548640" y="6035040"/>
+            <a:ext cx="9601200" cy="310896"/>
           </a:xfrm>
           <a:prstGeom prst="rect">
             <a:avLst/>
@@ -6885,7 +6780,7 @@
               <a:buNone/>
             </a:pPr>
             <a:r>
-              <a:rPr lang="en-US" sz="1200" b="1" dirty="0">
+              <a:rPr lang="en-US" sz="1400" b="1" dirty="0">
                 <a:solidFill>
                   <a:srgbClr val="7B3A8E"/>
                 </a:solidFill>
@@ -6896,14 +6791,14 @@
               <a:buNone/>
             </a:pPr>
             <a:r>
-              <a:rPr lang="en-US" sz="1200" dirty="0">
+              <a:rPr lang="en-US" sz="1400" dirty="0">
                 <a:solidFill>
                   <a:srgbClr val="7B3A8E"/>
                 </a:solidFill>
               </a:rPr>
               <a:t>mineral salts   ·   nitrate   ·   magnesium   ·   potassium</a:t>
             </a:r>
-            <a:endParaRPr lang="en-US" sz="1200" dirty="0"/>
+            <a:endParaRPr lang="en-US" sz="1400" dirty="0"/>
           </a:p>
         </p:txBody>
       </p:sp>
@@ -6944,7 +6839,7 @@
                         <a:buNone/>
                       </a:pPr>
                       <a:r>
-                        <a:rPr lang="en-US" sz="1300" b="1" dirty="0">
+                        <a:rPr lang="en-US" sz="1500" b="1" dirty="0">
                           <a:solidFill>
                             <a:srgbClr val="FFFFFF"/>
                           </a:solidFill>
@@ -6954,7 +6849,7 @@
                         </a:rPr>
                         <a:t>Mineral salt</a:t>
                       </a:r>
-                      <a:endParaRPr lang="en-US" sz="1300" dirty="0">
+                      <a:endParaRPr lang="en-US" sz="1500" dirty="0">
                         <a:latin typeface="Calibri" charset="0"/>
                         <a:ea typeface="Calibri" charset="0"/>
                         <a:cs typeface="Calibri" charset="0"/>
@@ -7012,7 +6907,7 @@
                         <a:buNone/>
                       </a:pPr>
                       <a:r>
-                        <a:rPr lang="en-US" sz="1300" b="1" dirty="0">
+                        <a:rPr lang="en-US" sz="1500" b="1" dirty="0">
                           <a:solidFill>
                             <a:srgbClr val="FFFFFF"/>
                           </a:solidFill>
@@ -7022,7 +6917,7 @@
                         </a:rPr>
                         <a:t>What the plant uses it for</a:t>
                       </a:r>
-                      <a:endParaRPr lang="en-US" sz="1300" dirty="0">
+                      <a:endParaRPr lang="en-US" sz="1500" dirty="0">
                         <a:latin typeface="Calibri" charset="0"/>
                         <a:ea typeface="Calibri" charset="0"/>
                         <a:cs typeface="Calibri" charset="0"/>
@@ -7080,7 +6975,7 @@
                         <a:buNone/>
                       </a:pPr>
                       <a:r>
-                        <a:rPr lang="en-US" sz="1300" b="1" dirty="0">
+                        <a:rPr lang="en-US" sz="1500" b="1" dirty="0">
                           <a:solidFill>
                             <a:srgbClr val="FFFFFF"/>
                           </a:solidFill>
@@ -7090,7 +6985,7 @@
                         </a:rPr>
                         <a:t>Sign of shortage</a:t>
                       </a:r>
-                      <a:endParaRPr lang="en-US" sz="1300" dirty="0">
+                      <a:endParaRPr lang="en-US" sz="1500" dirty="0">
                         <a:latin typeface="Calibri" charset="0"/>
                         <a:ea typeface="Calibri" charset="0"/>
                         <a:cs typeface="Calibri" charset="0"/>
@@ -7150,7 +7045,7 @@
                         <a:buNone/>
                       </a:pPr>
                       <a:r>
-                        <a:rPr lang="en-US" sz="1300" dirty="0">
+                        <a:rPr lang="en-US" sz="1500" dirty="0">
                           <a:solidFill>
                             <a:srgbClr val="141B26"/>
                           </a:solidFill>
@@ -7160,7 +7055,7 @@
                         </a:rPr>
                         <a:t>nitrates (nitrogen)</a:t>
                       </a:r>
-                      <a:endParaRPr lang="en-US" sz="1300" dirty="0">
+                      <a:endParaRPr lang="en-US" sz="1500" dirty="0">
                         <a:latin typeface="Calibri" charset="0"/>
                         <a:ea typeface="Calibri" charset="0"/>
                         <a:cs typeface="Calibri" charset="0"/>
@@ -7215,7 +7110,7 @@
                         <a:buNone/>
                       </a:pPr>
                       <a:r>
-                        <a:rPr lang="en-US" sz="1300" dirty="0">
+                        <a:rPr lang="en-US" sz="1500" dirty="0">
                           <a:solidFill>
                             <a:srgbClr val="141B26"/>
                           </a:solidFill>
@@ -7225,7 +7120,7 @@
                         </a:rPr>
                         <a:t>making proteins, so cells can grow</a:t>
                       </a:r>
-                      <a:endParaRPr lang="en-US" sz="1300" dirty="0">
+                      <a:endParaRPr lang="en-US" sz="1500" dirty="0">
                         <a:latin typeface="Calibri" charset="0"/>
                         <a:ea typeface="Calibri" charset="0"/>
                         <a:cs typeface="Calibri" charset="0"/>
@@ -7280,7 +7175,7 @@
                         <a:buNone/>
                       </a:pPr>
                       <a:r>
-                        <a:rPr lang="en-US" sz="1300" dirty="0">
+                        <a:rPr lang="en-US" sz="1500" dirty="0">
                           <a:solidFill>
                             <a:srgbClr val="141B26"/>
                           </a:solidFill>
@@ -7290,7 +7185,7 @@
                         </a:rPr>
                         <a:t>small, poor growth</a:t>
                       </a:r>
-                      <a:endParaRPr lang="en-US" sz="1300" dirty="0">
+                      <a:endParaRPr lang="en-US" sz="1500" dirty="0">
                         <a:latin typeface="Calibri" charset="0"/>
                         <a:ea typeface="Calibri" charset="0"/>
                         <a:cs typeface="Calibri" charset="0"/>
@@ -7347,7 +7242,7 @@
                         <a:buNone/>
                       </a:pPr>
                       <a:r>
-                        <a:rPr lang="en-US" sz="1300" dirty="0">
+                        <a:rPr lang="en-US" sz="1500" dirty="0">
                           <a:solidFill>
                             <a:srgbClr val="141B26"/>
                           </a:solidFill>
@@ -7357,7 +7252,7 @@
                         </a:rPr>
                         <a:t>magnesium</a:t>
                       </a:r>
-                      <a:endParaRPr lang="en-US" sz="1300" dirty="0">
+                      <a:endParaRPr lang="en-US" sz="1500" dirty="0">
                         <a:latin typeface="Calibri" charset="0"/>
                         <a:ea typeface="Calibri" charset="0"/>
                         <a:cs typeface="Calibri" charset="0"/>
@@ -7412,7 +7307,7 @@
                         <a:buNone/>
                       </a:pPr>
                       <a:r>
-                        <a:rPr lang="en-US" sz="1300" dirty="0">
+                        <a:rPr lang="en-US" sz="1500" dirty="0">
                           <a:solidFill>
                             <a:srgbClr val="141B26"/>
                           </a:solidFill>
@@ -7422,7 +7317,7 @@
                         </a:rPr>
                         <a:t>making chlorophyll</a:t>
                       </a:r>
-                      <a:endParaRPr lang="en-US" sz="1300" dirty="0">
+                      <a:endParaRPr lang="en-US" sz="1500" dirty="0">
                         <a:latin typeface="Calibri" charset="0"/>
                         <a:ea typeface="Calibri" charset="0"/>
                         <a:cs typeface="Calibri" charset="0"/>
@@ -7477,7 +7372,7 @@
                         <a:buNone/>
                       </a:pPr>
                       <a:r>
-                        <a:rPr lang="en-US" sz="1300" dirty="0">
+                        <a:rPr lang="en-US" sz="1500" dirty="0">
                           <a:solidFill>
                             <a:srgbClr val="141B26"/>
                           </a:solidFill>
@@ -7487,7 +7382,7 @@
                         </a:rPr>
                         <a:t>yellow leaves</a:t>
                       </a:r>
-                      <a:endParaRPr lang="en-US" sz="1300" dirty="0">
+                      <a:endParaRPr lang="en-US" sz="1500" dirty="0">
                         <a:latin typeface="Calibri" charset="0"/>
                         <a:ea typeface="Calibri" charset="0"/>
                         <a:cs typeface="Calibri" charset="0"/>
@@ -7544,7 +7439,7 @@
                         <a:buNone/>
                       </a:pPr>
                       <a:r>
-                        <a:rPr lang="en-US" sz="1300" dirty="0">
+                        <a:rPr lang="en-US" sz="1500" dirty="0">
                           <a:solidFill>
                             <a:srgbClr val="141B26"/>
                           </a:solidFill>
@@ -7554,7 +7449,7 @@
                         </a:rPr>
                         <a:t>potassium</a:t>
                       </a:r>
-                      <a:endParaRPr lang="en-US" sz="1300" dirty="0">
+                      <a:endParaRPr lang="en-US" sz="1500" dirty="0">
                         <a:latin typeface="Calibri" charset="0"/>
                         <a:ea typeface="Calibri" charset="0"/>
                         <a:cs typeface="Calibri" charset="0"/>
@@ -7609,7 +7504,7 @@
                         <a:buNone/>
                       </a:pPr>
                       <a:r>
-                        <a:rPr lang="en-US" sz="1300" dirty="0">
+                        <a:rPr lang="en-US" sz="1500" dirty="0">
                           <a:solidFill>
                             <a:srgbClr val="141B26"/>
                           </a:solidFill>
@@ -7619,7 +7514,7 @@
                         </a:rPr>
                         <a:t>root cells absorbing water properly</a:t>
                       </a:r>
-                      <a:endParaRPr lang="en-US" sz="1300" dirty="0">
+                      <a:endParaRPr lang="en-US" sz="1500" dirty="0">
                         <a:latin typeface="Calibri" charset="0"/>
                         <a:ea typeface="Calibri" charset="0"/>
                         <a:cs typeface="Calibri" charset="0"/>
@@ -7674,7 +7569,7 @@
                         <a:buNone/>
                       </a:pPr>
                       <a:r>
-                        <a:rPr lang="en-US" sz="1300" dirty="0">
+                        <a:rPr lang="en-US" sz="1500" dirty="0">
                           <a:solidFill>
                             <a:srgbClr val="141B26"/>
                           </a:solidFill>
@@ -7684,7 +7579,7 @@
                         </a:rPr>
                         <a:t>weak growth, wilting</a:t>
                       </a:r>
-                      <a:endParaRPr lang="en-US" sz="1300" dirty="0">
+                      <a:endParaRPr lang="en-US" sz="1500" dirty="0">
                         <a:latin typeface="Calibri" charset="0"/>
                         <a:ea typeface="Calibri" charset="0"/>
                         <a:cs typeface="Calibri" charset="0"/>
@@ -7753,45 +7648,43 @@
           <a:ln/>
         </p:spPr>
         <p:txBody>
-          <a:bodyPr wrap="square" lIns="0" tIns="0" rIns="0" bIns="0" rtlCol="0" anchor="t">
-            <a:normAutofit/>
-          </a:bodyPr>
-          <a:lstStyle/>
-          <a:p>
-            <a:pPr marL="228600" indent="-228600">
+          <a:bodyPr wrap="square" lIns="0" tIns="0" rIns="0" bIns="0" rtlCol="0" anchor="t"/>
+          <a:lstStyle/>
+          <a:p>
+            <a:pPr marL="304800" indent="-304800">
               <a:spcAft>
-                <a:spcPts val="600"/>
+                <a:spcPts val="800"/>
               </a:spcAft>
               <a:buSzPct val="100000"/>
               <a:buChar char="•"/>
             </a:pPr>
             <a:r>
-              <a:rPr lang="en-US" sz="1500" dirty="0">
+              <a:rPr lang="en-US" sz="1800" dirty="0">
                 <a:solidFill>
                   <a:srgbClr val="141B26"/>
                 </a:solidFill>
               </a:rPr>
               <a:t>Carbon, hydrogen and oxygen come from water and carbon dioxide.</a:t>
             </a:r>
-            <a:endParaRPr lang="en-US" sz="1500" dirty="0"/>
-          </a:p>
-          <a:p>
-            <a:pPr marL="228600" indent="-228600">
+            <a:endParaRPr lang="en-US" sz="1800" dirty="0"/>
+          </a:p>
+          <a:p>
+            <a:pPr marL="304800" indent="-304800">
               <a:spcAft>
-                <a:spcPts val="600"/>
+                <a:spcPts val="800"/>
               </a:spcAft>
               <a:buSzPct val="100000"/>
               <a:buChar char="•"/>
             </a:pPr>
             <a:r>
-              <a:rPr lang="en-US" sz="1500" dirty="0">
+              <a:rPr lang="en-US" sz="1800" dirty="0">
                 <a:solidFill>
                   <a:srgbClr val="141B26"/>
                 </a:solidFill>
               </a:rPr>
               <a:t>Mineral salts dissolve in soil water and enter through the roots.</a:t>
             </a:r>
-            <a:endParaRPr lang="en-US" sz="1500" dirty="0"/>
+            <a:endParaRPr lang="en-US" sz="1800" dirty="0"/>
           </a:p>
         </p:txBody>
       </p:sp>
@@ -7838,16 +7731,14 @@
           <a:ln/>
         </p:spPr>
         <p:txBody>
-          <a:bodyPr wrap="square" lIns="0" tIns="0" rIns="0" bIns="0" rtlCol="0" anchor="ctr">
-            <a:normAutofit/>
-          </a:bodyPr>
+          <a:bodyPr wrap="square" lIns="0" tIns="0" rIns="0" bIns="0" rtlCol="0" anchor="ctr"/>
           <a:lstStyle/>
           <a:p>
             <a:pPr indent="0" marL="0">
               <a:buNone/>
             </a:pPr>
             <a:r>
-              <a:rPr lang="en-US" sz="1400" b="1" dirty="0">
+              <a:rPr lang="en-US" sz="1700" b="1" dirty="0">
                 <a:solidFill>
                   <a:srgbClr val="7B3A8E"/>
                 </a:solidFill>
@@ -7858,14 +7749,14 @@
               <a:buNone/>
             </a:pPr>
             <a:r>
-              <a:rPr lang="en-US" sz="1400" dirty="0">
+              <a:rPr lang="en-US" sz="1700" dirty="0">
                 <a:solidFill>
                   <a:srgbClr val="141B26"/>
                 </a:solidFill>
               </a:rPr>
               <a:t>Mineral salts are not food: they are building materials. Nitrates build proteins; magnesium builds chlorophyll.</a:t>
             </a:r>
-            <a:endParaRPr lang="en-US" sz="1400" dirty="0"/>
+            <a:endParaRPr lang="en-US" sz="1700" dirty="0"/>
           </a:p>
         </p:txBody>
       </p:sp>
@@ -8048,8 +7939,8 @@
         </p:nvSpPr>
         <p:spPr>
           <a:xfrm>
-            <a:off x="548640" y="6053328"/>
-            <a:ext cx="9601200" cy="292608"/>
+            <a:off x="548640" y="6035040"/>
+            <a:ext cx="9601200" cy="310896"/>
           </a:xfrm>
           <a:prstGeom prst="rect">
             <a:avLst/>
@@ -8065,7 +7956,7 @@
               <a:buNone/>
             </a:pPr>
             <a:r>
-              <a:rPr lang="en-US" sz="1200" b="1" dirty="0">
+              <a:rPr lang="en-US" sz="1400" b="1" dirty="0">
                 <a:solidFill>
                   <a:srgbClr val="7B3A8E"/>
                 </a:solidFill>
@@ -8076,14 +7967,14 @@
               <a:buNone/>
             </a:pPr>
             <a:r>
-              <a:rPr lang="en-US" sz="1200" dirty="0">
+              <a:rPr lang="en-US" sz="1400" dirty="0">
                 <a:solidFill>
                   <a:srgbClr val="7B3A8E"/>
                 </a:solidFill>
               </a:rPr>
               <a:t>root hair cell   ·   xylem   ·   surface area</a:t>
             </a:r>
-            <a:endParaRPr lang="en-US" sz="1200" dirty="0"/>
+            <a:endParaRPr lang="en-US" sz="1400" dirty="0"/>
           </a:p>
         </p:txBody>
       </p:sp>
@@ -8105,99 +7996,97 @@
           <a:ln/>
         </p:spPr>
         <p:txBody>
-          <a:bodyPr wrap="square" lIns="0" tIns="0" rIns="0" bIns="0" rtlCol="0" anchor="t">
-            <a:normAutofit/>
-          </a:bodyPr>
-          <a:lstStyle/>
-          <a:p>
-            <a:pPr marL="228600" indent="-228600">
+          <a:bodyPr wrap="square" lIns="0" tIns="0" rIns="0" bIns="0" rtlCol="0" anchor="t"/>
+          <a:lstStyle/>
+          <a:p>
+            <a:pPr marL="304800" indent="-304800">
               <a:spcAft>
-                <a:spcPts val="600"/>
+                <a:spcPts val="800"/>
               </a:spcAft>
               <a:buSzPct val="100000"/>
               <a:buChar char="•"/>
             </a:pPr>
             <a:r>
-              <a:rPr lang="en-US" sz="1700" dirty="0">
+              <a:rPr lang="en-US" sz="2000" dirty="0">
                 <a:solidFill>
                   <a:srgbClr val="141B26"/>
                 </a:solidFill>
               </a:rPr>
               <a:t>Roots hold the plant in place and absorb water with dissolved mineral salts.</a:t>
             </a:r>
-            <a:endParaRPr lang="en-US" sz="1700" dirty="0"/>
-          </a:p>
-          <a:p>
-            <a:pPr marL="228600" indent="-228600">
+            <a:endParaRPr lang="en-US" sz="2000" dirty="0"/>
+          </a:p>
+          <a:p>
+            <a:pPr marL="304800" indent="-304800">
               <a:spcAft>
-                <a:spcPts val="600"/>
+                <a:spcPts val="800"/>
               </a:spcAft>
               <a:buSzPct val="100000"/>
               <a:buChar char="•"/>
             </a:pPr>
             <a:r>
-              <a:rPr lang="en-US" sz="1700" dirty="0">
+              <a:rPr lang="en-US" sz="2000" dirty="0">
                 <a:solidFill>
                   <a:srgbClr val="141B26"/>
                 </a:solidFill>
               </a:rPr>
               <a:t>Roots are branched and spread out to reach water in a large volume of soil.</a:t>
             </a:r>
-            <a:endParaRPr lang="en-US" sz="1700" dirty="0"/>
-          </a:p>
-          <a:p>
-            <a:pPr marL="228600" indent="-228600">
+            <a:endParaRPr lang="en-US" sz="2000" dirty="0"/>
+          </a:p>
+          <a:p>
+            <a:pPr marL="304800" indent="-304800">
               <a:spcAft>
-                <a:spcPts val="600"/>
+                <a:spcPts val="800"/>
               </a:spcAft>
               <a:buSzPct val="100000"/>
               <a:buChar char="•"/>
             </a:pPr>
             <a:r>
-              <a:rPr lang="en-US" sz="1700" dirty="0">
+              <a:rPr lang="en-US" sz="2000" dirty="0">
                 <a:solidFill>
                   <a:srgbClr val="141B26"/>
                 </a:solidFill>
               </a:rPr>
               <a:t>Root hair cells have a long extension: a large surface area to absorb water quickly.</a:t>
             </a:r>
-            <a:endParaRPr lang="en-US" sz="1700" dirty="0"/>
-          </a:p>
-          <a:p>
-            <a:pPr marL="228600" indent="-228600">
+            <a:endParaRPr lang="en-US" sz="2000" dirty="0"/>
+          </a:p>
+          <a:p>
+            <a:pPr marL="304800" indent="-304800">
               <a:spcAft>
-                <a:spcPts val="600"/>
+                <a:spcPts val="800"/>
               </a:spcAft>
               <a:buSzPct val="100000"/>
               <a:buChar char="•"/>
             </a:pPr>
             <a:r>
-              <a:rPr lang="en-US" sz="1700" dirty="0">
+              <a:rPr lang="en-US" sz="2000" dirty="0">
                 <a:solidFill>
                   <a:srgbClr val="141B26"/>
                 </a:solidFill>
               </a:rPr>
               <a:t>Water passes to xylem vessels: long hollow tubes formed when chains of xylem cells die.</a:t>
             </a:r>
-            <a:endParaRPr lang="en-US" sz="1700" dirty="0"/>
-          </a:p>
-          <a:p>
-            <a:pPr marL="228600" indent="-228600">
+            <a:endParaRPr lang="en-US" sz="2000" dirty="0"/>
+          </a:p>
+          <a:p>
+            <a:pPr marL="304800" indent="-304800">
               <a:spcAft>
-                <a:spcPts val="600"/>
+                <a:spcPts val="800"/>
               </a:spcAft>
               <a:buSzPct val="100000"/>
               <a:buChar char="•"/>
             </a:pPr>
             <a:r>
-              <a:rPr lang="en-US" sz="1700" dirty="0">
+              <a:rPr lang="en-US" sz="2000" dirty="0">
                 <a:solidFill>
                   <a:srgbClr val="141B26"/>
                 </a:solidFill>
               </a:rPr>
               <a:t>Xylem carries water and mineral salts up to the leaves.</a:t>
             </a:r>
-            <a:endParaRPr lang="en-US" sz="1700" dirty="0"/>
+            <a:endParaRPr lang="en-US" sz="2000" dirty="0"/>
           </a:p>
         </p:txBody>
       </p:sp>
@@ -8234,7 +8123,7 @@
         <p:spPr>
           <a:xfrm>
             <a:off x="6583680" y="4572983"/>
-            <a:ext cx="5029200" cy="502920"/>
+            <a:ext cx="5029200" cy="548640"/>
           </a:xfrm>
           <a:prstGeom prst="rect">
             <a:avLst/>
@@ -8250,7 +8139,7 @@
               <a:buNone/>
             </a:pPr>
             <a:r>
-              <a:rPr lang="en-US" sz="1100" dirty="0">
+              <a:rPr lang="en-US" sz="1300" dirty="0">
                 <a:solidFill>
                   <a:srgbClr val="141B26"/>
                 </a:solidFill>
@@ -8260,21 +8149,21 @@
             <a:pPr algn="l" indent="0" marL="0">
               <a:buNone/>
             </a:pPr>
-            <a:endParaRPr lang="en-US" sz="1100" dirty="0"/>
+            <a:endParaRPr lang="en-US" sz="1300" dirty="0"/>
           </a:p>
           <a:p>
             <a:pPr algn="l" indent="0" marL="0">
               <a:buNone/>
             </a:pPr>
             <a:r>
-              <a:rPr lang="en-US" sz="800" dirty="0">
+              <a:rPr lang="en-US" sz="900" dirty="0">
                 <a:solidFill>
                   <a:srgbClr val="5B6574"/>
                 </a:solidFill>
               </a:rPr>
               <a:t>Image: bccoer, CC0, via Wikimedia Commons</a:t>
             </a:r>
-            <a:endParaRPr lang="en-US" sz="1100" dirty="0"/>
+            <a:endParaRPr lang="en-US" sz="1300" dirty="0"/>
           </a:p>
         </p:txBody>
       </p:sp>
@@ -8321,16 +8210,14 @@
           <a:ln/>
         </p:spPr>
         <p:txBody>
-          <a:bodyPr wrap="square" lIns="0" tIns="0" rIns="0" bIns="0" rtlCol="0" anchor="ctr">
-            <a:normAutofit/>
-          </a:bodyPr>
+          <a:bodyPr wrap="square" lIns="0" tIns="0" rIns="0" bIns="0" rtlCol="0" anchor="ctr"/>
           <a:lstStyle/>
           <a:p>
             <a:pPr indent="0" marL="0">
               <a:buNone/>
             </a:pPr>
             <a:r>
-              <a:rPr lang="en-US" sz="1400" b="1" dirty="0">
+              <a:rPr lang="en-US" sz="1700" b="1" dirty="0">
                 <a:solidFill>
                   <a:srgbClr val="7B3A8E"/>
                 </a:solidFill>
@@ -8341,14 +8228,14 @@
               <a:buNone/>
             </a:pPr>
             <a:r>
-              <a:rPr lang="en-US" sz="1400" dirty="0">
+              <a:rPr lang="en-US" sz="1700" dirty="0">
                 <a:solidFill>
                   <a:srgbClr val="141B26"/>
                 </a:solidFill>
               </a:rPr>
               <a:t>Large surface area = faster absorption. Hollow dead cells = a pipe.</a:t>
             </a:r>
-            <a:endParaRPr lang="en-US" sz="1400" dirty="0"/>
+            <a:endParaRPr lang="en-US" sz="1700" dirty="0"/>
           </a:p>
         </p:txBody>
       </p:sp>
@@ -8531,8 +8418,8 @@
         </p:nvSpPr>
         <p:spPr>
           <a:xfrm>
-            <a:off x="548640" y="6053328"/>
-            <a:ext cx="9601200" cy="292608"/>
+            <a:off x="548640" y="6035040"/>
+            <a:ext cx="9601200" cy="310896"/>
           </a:xfrm>
           <a:prstGeom prst="rect">
             <a:avLst/>
@@ -8548,7 +8435,7 @@
               <a:buNone/>
             </a:pPr>
             <a:r>
-              <a:rPr lang="en-US" sz="1200" b="1" dirty="0">
+              <a:rPr lang="en-US" sz="1400" b="1" dirty="0">
                 <a:solidFill>
                   <a:srgbClr val="7B3A8E"/>
                 </a:solidFill>
@@ -8559,14 +8446,14 @@
               <a:buNone/>
             </a:pPr>
             <a:r>
-              <a:rPr lang="en-US" sz="1200" dirty="0">
+              <a:rPr lang="en-US" sz="1400" dirty="0">
                 <a:solidFill>
                   <a:srgbClr val="7B3A8E"/>
                 </a:solidFill>
               </a:rPr>
               <a:t>xylem   ·   wilt</a:t>
             </a:r>
-            <a:endParaRPr lang="en-US" sz="1200" dirty="0"/>
+            <a:endParaRPr lang="en-US" sz="1400" dirty="0"/>
           </a:p>
         </p:txBody>
       </p:sp>
@@ -8595,14 +8482,14 @@
               <a:buNone/>
             </a:pPr>
             <a:r>
-              <a:rPr lang="en-US" sz="1600" dirty="0">
+              <a:rPr lang="en-US" sz="1700" dirty="0">
                 <a:solidFill>
                   <a:srgbClr val="141B26"/>
                 </a:solidFill>
               </a:rPr>
               <a:t>Water is needed for photosynthesis, to keep leaves cool, and to fill cells so they stay firm.</a:t>
             </a:r>
-            <a:endParaRPr lang="en-US" sz="1600" dirty="0"/>
+            <a:endParaRPr lang="en-US" sz="1700" dirty="0"/>
           </a:p>
         </p:txBody>
       </p:sp>
@@ -8673,16 +8560,14 @@
           <a:ln/>
         </p:spPr>
         <p:txBody>
-          <a:bodyPr wrap="square" lIns="0" tIns="0" rIns="0" bIns="0" rtlCol="0" anchor="ctr">
-            <a:normAutofit/>
-          </a:bodyPr>
+          <a:bodyPr wrap="square" lIns="0" tIns="0" rIns="0" bIns="0" rtlCol="0" anchor="ctr"/>
           <a:lstStyle/>
           <a:p>
             <a:pPr indent="0" marL="0">
               <a:buNone/>
             </a:pPr>
             <a:r>
-              <a:rPr lang="en-US" sz="1400" b="1" dirty="0">
+              <a:rPr lang="en-US" sz="1700" b="1" dirty="0">
                 <a:solidFill>
                   <a:srgbClr val="7B3A8E"/>
                 </a:solidFill>
@@ -8693,14 +8578,14 @@
               <a:buNone/>
             </a:pPr>
             <a:r>
-              <a:rPr lang="en-US" sz="1400" dirty="0">
+              <a:rPr lang="en-US" sz="1700" dirty="0">
                 <a:solidFill>
                   <a:srgbClr val="141B26"/>
                 </a:solidFill>
               </a:rPr>
               <a:t>Too little water: the cells sag, the leaves droop and the plant wilts. Water the plant and the cells fill again.</a:t>
             </a:r>
-            <a:endParaRPr lang="en-US" sz="1400" dirty="0"/>
+            <a:endParaRPr lang="en-US" sz="1700" dirty="0"/>
           </a:p>
         </p:txBody>
       </p:sp>
@@ -8883,8 +8768,8 @@
         </p:nvSpPr>
         <p:spPr>
           <a:xfrm>
-            <a:off x="548640" y="6053328"/>
-            <a:ext cx="9601200" cy="292608"/>
+            <a:off x="548640" y="6035040"/>
+            <a:ext cx="9601200" cy="310896"/>
           </a:xfrm>
           <a:prstGeom prst="rect">
             <a:avLst/>
@@ -8900,7 +8785,7 @@
               <a:buNone/>
             </a:pPr>
             <a:r>
-              <a:rPr lang="en-US" sz="1200" b="1" dirty="0">
+              <a:rPr lang="en-US" sz="1400" b="1" dirty="0">
                 <a:solidFill>
                   <a:srgbClr val="7B3A8E"/>
                 </a:solidFill>
@@ -8911,14 +8796,14 @@
               <a:buNone/>
             </a:pPr>
             <a:r>
-              <a:rPr lang="en-US" sz="1200" dirty="0">
+              <a:rPr lang="en-US" sz="1400" dirty="0">
                 <a:solidFill>
                   <a:srgbClr val="7B3A8E"/>
                 </a:solidFill>
               </a:rPr>
               <a:t>palisade cell   ·   epidermis   ·   cuticle</a:t>
             </a:r>
-            <a:endParaRPr lang="en-US" sz="1200" dirty="0"/>
+            <a:endParaRPr lang="en-US" sz="1400" dirty="0"/>
           </a:p>
         </p:txBody>
       </p:sp>
@@ -8947,14 +8832,14 @@
               <a:buNone/>
             </a:pPr>
             <a:r>
-              <a:rPr lang="en-US" sz="1600" dirty="0">
+              <a:rPr lang="en-US" sz="1700" dirty="0">
                 <a:solidFill>
                   <a:srgbClr val="141B26"/>
                 </a:solidFill>
               </a:rPr>
               <a:t>Leaves are broad and thin. Which layer has the most chloroplasts, and why is it near the top?</a:t>
             </a:r>
-            <a:endParaRPr lang="en-US" sz="1600" dirty="0"/>
+            <a:endParaRPr lang="en-US" sz="1700" dirty="0"/>
           </a:p>
         </p:txBody>
       </p:sp>
@@ -8974,8 +8859,8 @@
         </p:blipFill>
         <p:spPr>
           <a:xfrm>
-            <a:off x="2738120" y="1737360"/>
-            <a:ext cx="6502400" cy="3657600"/>
+            <a:off x="2129056" y="1737360"/>
+            <a:ext cx="7720528" cy="3657600"/>
           </a:xfrm>
           <a:prstGeom prst="rect">
             <a:avLst/>
@@ -9025,16 +8910,14 @@
           <a:ln/>
         </p:spPr>
         <p:txBody>
-          <a:bodyPr wrap="square" lIns="0" tIns="0" rIns="0" bIns="0" rtlCol="0" anchor="ctr">
-            <a:normAutofit/>
-          </a:bodyPr>
+          <a:bodyPr wrap="square" lIns="0" tIns="0" rIns="0" bIns="0" rtlCol="0" anchor="ctr"/>
           <a:lstStyle/>
           <a:p>
             <a:pPr indent="0" marL="0">
               <a:buNone/>
             </a:pPr>
             <a:r>
-              <a:rPr lang="en-US" sz="1400" b="1" dirty="0">
+              <a:rPr lang="en-US" sz="1700" b="1" dirty="0">
                 <a:solidFill>
                   <a:srgbClr val="7B3A8E"/>
                 </a:solidFill>
@@ -9045,14 +8928,14 @@
               <a:buNone/>
             </a:pPr>
             <a:r>
-              <a:rPr lang="en-US" sz="1400" dirty="0">
+              <a:rPr lang="en-US" sz="1700" dirty="0">
                 <a:solidFill>
                   <a:srgbClr val="141B26"/>
                 </a:solidFill>
               </a:rPr>
               <a:t>Palisade cells sit near the upper surface, where there is most light, and are packed with chloroplasts.</a:t>
             </a:r>
-            <a:endParaRPr lang="en-US" sz="1400" dirty="0"/>
+            <a:endParaRPr lang="en-US" sz="1700" dirty="0"/>
           </a:p>
         </p:txBody>
       </p:sp>
@@ -9235,8 +9118,8 @@
         </p:nvSpPr>
         <p:spPr>
           <a:xfrm>
-            <a:off x="548640" y="6053328"/>
-            <a:ext cx="9601200" cy="292608"/>
+            <a:off x="548640" y="6035040"/>
+            <a:ext cx="9601200" cy="310896"/>
           </a:xfrm>
           <a:prstGeom prst="rect">
             <a:avLst/>
@@ -9252,7 +9135,7 @@
               <a:buNone/>
             </a:pPr>
             <a:r>
-              <a:rPr lang="en-US" sz="1200" b="1" dirty="0">
+              <a:rPr lang="en-US" sz="1400" b="1" dirty="0">
                 <a:solidFill>
                   <a:srgbClr val="7B3A8E"/>
                 </a:solidFill>
@@ -9263,14 +9146,14 @@
               <a:buNone/>
             </a:pPr>
             <a:r>
-              <a:rPr lang="en-US" sz="1200" dirty="0">
+              <a:rPr lang="en-US" sz="1400" dirty="0">
                 <a:solidFill>
                   <a:srgbClr val="7B3A8E"/>
                 </a:solidFill>
               </a:rPr>
               <a:t>palisade cell   ·   cuticle   ·   surface area</a:t>
             </a:r>
-            <a:endParaRPr lang="en-US" sz="1200" dirty="0"/>
+            <a:endParaRPr lang="en-US" sz="1400" dirty="0"/>
           </a:p>
         </p:txBody>
       </p:sp>
@@ -9292,99 +9175,97 @@
           <a:ln/>
         </p:spPr>
         <p:txBody>
-          <a:bodyPr wrap="square" lIns="0" tIns="0" rIns="0" bIns="0" rtlCol="0" anchor="t">
-            <a:normAutofit/>
-          </a:bodyPr>
-          <a:lstStyle/>
-          <a:p>
-            <a:pPr marL="228600" indent="-228600">
+          <a:bodyPr wrap="square" lIns="0" tIns="0" rIns="0" bIns="0" rtlCol="0" anchor="t"/>
+          <a:lstStyle/>
+          <a:p>
+            <a:pPr marL="304800" indent="-304800">
               <a:spcAft>
-                <a:spcPts val="600"/>
+                <a:spcPts val="800"/>
               </a:spcAft>
               <a:buSzPct val="100000"/>
               <a:buChar char="•"/>
             </a:pPr>
             <a:r>
-              <a:rPr lang="en-US" sz="1700" dirty="0">
+              <a:rPr lang="en-US" sz="2000" dirty="0">
                 <a:solidFill>
                   <a:srgbClr val="141B26"/>
                 </a:solidFill>
               </a:rPr>
               <a:t>Broad leaves have a large surface area to trap light.</a:t>
             </a:r>
-            <a:endParaRPr lang="en-US" sz="1700" dirty="0"/>
-          </a:p>
-          <a:p>
-            <a:pPr marL="228600" indent="-228600">
+            <a:endParaRPr lang="en-US" sz="2000" dirty="0"/>
+          </a:p>
+          <a:p>
+            <a:pPr marL="304800" indent="-304800">
               <a:spcAft>
-                <a:spcPts val="600"/>
+                <a:spcPts val="800"/>
               </a:spcAft>
               <a:buSzPct val="100000"/>
               <a:buChar char="•"/>
             </a:pPr>
             <a:r>
-              <a:rPr lang="en-US" sz="1700" dirty="0">
+              <a:rPr lang="en-US" sz="2000" dirty="0">
                 <a:solidFill>
                   <a:srgbClr val="141B26"/>
                 </a:solidFill>
               </a:rPr>
               <a:t>Leaves are arranged so the upper ones do not shade the lower ones too much.</a:t>
             </a:r>
-            <a:endParaRPr lang="en-US" sz="1700" dirty="0"/>
-          </a:p>
-          <a:p>
-            <a:pPr marL="228600" indent="-228600">
+            <a:endParaRPr lang="en-US" sz="2000" dirty="0"/>
+          </a:p>
+          <a:p>
+            <a:pPr marL="304800" indent="-304800">
               <a:spcAft>
-                <a:spcPts val="600"/>
+                <a:spcPts val="800"/>
               </a:spcAft>
               <a:buSzPct val="100000"/>
               <a:buChar char="•"/>
             </a:pPr>
             <a:r>
-              <a:rPr lang="en-US" sz="1700" dirty="0">
+              <a:rPr lang="en-US" sz="2000" dirty="0">
                 <a:solidFill>
                   <a:srgbClr val="141B26"/>
                 </a:solidFill>
               </a:rPr>
               <a:t>The epidermis makes a waxy cuticle that stops the leaf losing too much water.</a:t>
             </a:r>
-            <a:endParaRPr lang="en-US" sz="1700" dirty="0"/>
-          </a:p>
-          <a:p>
-            <a:pPr marL="228600" indent="-228600">
+            <a:endParaRPr lang="en-US" sz="2000" dirty="0"/>
+          </a:p>
+          <a:p>
+            <a:pPr marL="304800" indent="-304800">
               <a:spcAft>
-                <a:spcPts val="600"/>
+                <a:spcPts val="800"/>
               </a:spcAft>
               <a:buSzPct val="100000"/>
               <a:buChar char="•"/>
             </a:pPr>
             <a:r>
-              <a:rPr lang="en-US" sz="1700" dirty="0">
+              <a:rPr lang="en-US" sz="2000" dirty="0">
                 <a:solidFill>
                   <a:srgbClr val="141B26"/>
                 </a:solidFill>
               </a:rPr>
               <a:t>Palisade cells contain many chloroplasts, where photosynthesis happens.</a:t>
             </a:r>
-            <a:endParaRPr lang="en-US" sz="1700" dirty="0"/>
-          </a:p>
-          <a:p>
-            <a:pPr marL="228600" indent="-228600">
+            <a:endParaRPr lang="en-US" sz="2000" dirty="0"/>
+          </a:p>
+          <a:p>
+            <a:pPr marL="304800" indent="-304800">
               <a:spcAft>
-                <a:spcPts val="600"/>
+                <a:spcPts val="800"/>
               </a:spcAft>
               <a:buSzPct val="100000"/>
               <a:buChar char="•"/>
             </a:pPr>
             <a:r>
-              <a:rPr lang="en-US" sz="1700" dirty="0">
+              <a:rPr lang="en-US" sz="2000" dirty="0">
                 <a:solidFill>
                   <a:srgbClr val="141B26"/>
                 </a:solidFill>
               </a:rPr>
               <a:t>In dim light the chloroplasts move nearer the surface; in bright light they move away to avoid damage.</a:t>
             </a:r>
-            <a:endParaRPr lang="en-US" sz="1700" dirty="0"/>
+            <a:endParaRPr lang="en-US" sz="2000" dirty="0"/>
           </a:p>
         </p:txBody>
       </p:sp>
@@ -9421,7 +9302,7 @@
         <p:spPr>
           <a:xfrm>
             <a:off x="6583680" y="4572983"/>
-            <a:ext cx="5029200" cy="502920"/>
+            <a:ext cx="5029200" cy="548640"/>
           </a:xfrm>
           <a:prstGeom prst="rect">
             <a:avLst/>
@@ -9437,7 +9318,7 @@
               <a:buNone/>
             </a:pPr>
             <a:r>
-              <a:rPr lang="en-US" sz="1100" dirty="0">
+              <a:rPr lang="en-US" sz="1300" dirty="0">
                 <a:solidFill>
                   <a:srgbClr val="141B26"/>
                 </a:solidFill>
@@ -9447,21 +9328,21 @@
             <a:pPr algn="l" indent="0" marL="0">
               <a:buNone/>
             </a:pPr>
-            <a:endParaRPr lang="en-US" sz="1100" dirty="0"/>
+            <a:endParaRPr lang="en-US" sz="1300" dirty="0"/>
           </a:p>
           <a:p>
             <a:pPr algn="l" indent="0" marL="0">
               <a:buNone/>
             </a:pPr>
             <a:r>
-              <a:rPr lang="en-US" sz="800" dirty="0">
+              <a:rPr lang="en-US" sz="900" dirty="0">
                 <a:solidFill>
                   <a:srgbClr val="5B6574"/>
                 </a:solidFill>
               </a:rPr>
               <a:t>Image: bccoer, CC0, via Wikimedia Commons</a:t>
             </a:r>
-            <a:endParaRPr lang="en-US" sz="1100" dirty="0"/>
+            <a:endParaRPr lang="en-US" sz="1300" dirty="0"/>
           </a:p>
         </p:txBody>
       </p:sp>
@@ -9508,16 +9389,14 @@
           <a:ln/>
         </p:spPr>
         <p:txBody>
-          <a:bodyPr wrap="square" lIns="0" tIns="0" rIns="0" bIns="0" rtlCol="0" anchor="ctr">
-            <a:normAutofit/>
-          </a:bodyPr>
+          <a:bodyPr wrap="square" lIns="0" tIns="0" rIns="0" bIns="0" rtlCol="0" anchor="ctr"/>
           <a:lstStyle/>
           <a:p>
             <a:pPr indent="0" marL="0">
               <a:buNone/>
             </a:pPr>
             <a:r>
-              <a:rPr lang="en-US" sz="1400" b="1" dirty="0">
+              <a:rPr lang="en-US" sz="1700" b="1" dirty="0">
                 <a:solidFill>
                   <a:srgbClr val="7B3A8E"/>
                 </a:solidFill>
@@ -9528,14 +9407,14 @@
               <a:buNone/>
             </a:pPr>
             <a:r>
-              <a:rPr lang="en-US" sz="1400" dirty="0">
+              <a:rPr lang="en-US" sz="1700" dirty="0">
                 <a:solidFill>
                   <a:srgbClr val="141B26"/>
                 </a:solidFill>
               </a:rPr>
               <a:t>Shape fits function: broad and thin for light, a cuticle to keep water in, palisade cells full of chloroplasts.</a:t>
             </a:r>
-            <a:endParaRPr lang="en-US" sz="1400" dirty="0"/>
+            <a:endParaRPr lang="en-US" sz="1700" dirty="0"/>
           </a:p>
         </p:txBody>
       </p:sp>
